--- a/Unused/b-Office/项目报告.pptx
+++ b/Unused/b-Office/项目报告.pptx
@@ -14,21 +14,19 @@
     <p:sldId id="273" r:id="rId8"/>
     <p:sldId id="263" r:id="rId9"/>
     <p:sldId id="264" r:id="rId10"/>
-    <p:sldId id="265" r:id="rId11"/>
-    <p:sldId id="266" r:id="rId12"/>
-    <p:sldId id="267" r:id="rId13"/>
-    <p:sldId id="268" r:id="rId14"/>
-    <p:sldId id="269" r:id="rId15"/>
-    <p:sldId id="270" r:id="rId16"/>
-    <p:sldId id="271" r:id="rId17"/>
-    <p:sldId id="272" r:id="rId18"/>
-    <p:sldId id="274" r:id="rId19"/>
-    <p:sldId id="275" r:id="rId20"/>
-    <p:sldId id="276" r:id="rId21"/>
-    <p:sldId id="277" r:id="rId22"/>
-    <p:sldId id="278" r:id="rId23"/>
-    <p:sldId id="279" r:id="rId24"/>
-    <p:sldId id="280" r:id="rId25"/>
+    <p:sldId id="266" r:id="rId11"/>
+    <p:sldId id="267" r:id="rId12"/>
+    <p:sldId id="268" r:id="rId13"/>
+    <p:sldId id="270" r:id="rId14"/>
+    <p:sldId id="271" r:id="rId15"/>
+    <p:sldId id="272" r:id="rId16"/>
+    <p:sldId id="274" r:id="rId17"/>
+    <p:sldId id="275" r:id="rId18"/>
+    <p:sldId id="276" r:id="rId19"/>
+    <p:sldId id="277" r:id="rId20"/>
+    <p:sldId id="278" r:id="rId21"/>
+    <p:sldId id="279" r:id="rId22"/>
+    <p:sldId id="280" r:id="rId23"/>
   </p:sldIdLst>
   <p:sldSz cx="12192000" cy="6858000"/>
   <p:notesSz cx="6858000" cy="9144000"/>
@@ -282,7 +280,7 @@
           <a:p>
             <a:fld id="{581A1311-718C-4E8E-8010-28C99C476D3E}" type="datetimeFigureOut">
               <a:rPr lang="zh-CN" altLang="en-US" smtClean="0"/>
-              <a:t>2025/11/14</a:t>
+              <a:t>2026/7/6</a:t>
             </a:fld>
             <a:endParaRPr lang="zh-CN" altLang="en-US"/>
           </a:p>
@@ -480,7 +478,7 @@
           <a:p>
             <a:fld id="{581A1311-718C-4E8E-8010-28C99C476D3E}" type="datetimeFigureOut">
               <a:rPr lang="zh-CN" altLang="en-US" smtClean="0"/>
-              <a:t>2025/11/14</a:t>
+              <a:t>2026/7/6</a:t>
             </a:fld>
             <a:endParaRPr lang="zh-CN" altLang="en-US"/>
           </a:p>
@@ -688,7 +686,7 @@
           <a:p>
             <a:fld id="{581A1311-718C-4E8E-8010-28C99C476D3E}" type="datetimeFigureOut">
               <a:rPr lang="zh-CN" altLang="en-US" smtClean="0"/>
-              <a:t>2025/11/14</a:t>
+              <a:t>2026/7/6</a:t>
             </a:fld>
             <a:endParaRPr lang="zh-CN" altLang="en-US"/>
           </a:p>
@@ -886,7 +884,7 @@
           <a:p>
             <a:fld id="{581A1311-718C-4E8E-8010-28C99C476D3E}" type="datetimeFigureOut">
               <a:rPr lang="zh-CN" altLang="en-US" smtClean="0"/>
-              <a:t>2025/11/14</a:t>
+              <a:t>2026/7/6</a:t>
             </a:fld>
             <a:endParaRPr lang="zh-CN" altLang="en-US"/>
           </a:p>
@@ -1161,7 +1159,7 @@
           <a:p>
             <a:fld id="{581A1311-718C-4E8E-8010-28C99C476D3E}" type="datetimeFigureOut">
               <a:rPr lang="zh-CN" altLang="en-US" smtClean="0"/>
-              <a:t>2025/11/14</a:t>
+              <a:t>2026/7/6</a:t>
             </a:fld>
             <a:endParaRPr lang="zh-CN" altLang="en-US"/>
           </a:p>
@@ -1426,7 +1424,7 @@
           <a:p>
             <a:fld id="{581A1311-718C-4E8E-8010-28C99C476D3E}" type="datetimeFigureOut">
               <a:rPr lang="zh-CN" altLang="en-US" smtClean="0"/>
-              <a:t>2025/11/14</a:t>
+              <a:t>2026/7/6</a:t>
             </a:fld>
             <a:endParaRPr lang="zh-CN" altLang="en-US"/>
           </a:p>
@@ -1838,7 +1836,7 @@
           <a:p>
             <a:fld id="{581A1311-718C-4E8E-8010-28C99C476D3E}" type="datetimeFigureOut">
               <a:rPr lang="zh-CN" altLang="en-US" smtClean="0"/>
-              <a:t>2025/11/14</a:t>
+              <a:t>2026/7/6</a:t>
             </a:fld>
             <a:endParaRPr lang="zh-CN" altLang="en-US"/>
           </a:p>
@@ -1979,7 +1977,7 @@
           <a:p>
             <a:fld id="{581A1311-718C-4E8E-8010-28C99C476D3E}" type="datetimeFigureOut">
               <a:rPr lang="zh-CN" altLang="en-US" smtClean="0"/>
-              <a:t>2025/11/14</a:t>
+              <a:t>2026/7/6</a:t>
             </a:fld>
             <a:endParaRPr lang="zh-CN" altLang="en-US"/>
           </a:p>
@@ -2092,7 +2090,7 @@
           <a:p>
             <a:fld id="{581A1311-718C-4E8E-8010-28C99C476D3E}" type="datetimeFigureOut">
               <a:rPr lang="zh-CN" altLang="en-US" smtClean="0"/>
-              <a:t>2025/11/14</a:t>
+              <a:t>2026/7/6</a:t>
             </a:fld>
             <a:endParaRPr lang="zh-CN" altLang="en-US"/>
           </a:p>
@@ -2403,7 +2401,7 @@
           <a:p>
             <a:fld id="{581A1311-718C-4E8E-8010-28C99C476D3E}" type="datetimeFigureOut">
               <a:rPr lang="zh-CN" altLang="en-US" smtClean="0"/>
-              <a:t>2025/11/14</a:t>
+              <a:t>2026/7/6</a:t>
             </a:fld>
             <a:endParaRPr lang="zh-CN" altLang="en-US"/>
           </a:p>
@@ -2691,7 +2689,7 @@
           <a:p>
             <a:fld id="{581A1311-718C-4E8E-8010-28C99C476D3E}" type="datetimeFigureOut">
               <a:rPr lang="zh-CN" altLang="en-US" smtClean="0"/>
-              <a:t>2025/11/14</a:t>
+              <a:t>2026/7/6</a:t>
             </a:fld>
             <a:endParaRPr lang="zh-CN" altLang="en-US"/>
           </a:p>
@@ -2932,7 +2930,7 @@
           <a:p>
             <a:fld id="{581A1311-718C-4E8E-8010-28C99C476D3E}" type="datetimeFigureOut">
               <a:rPr lang="zh-CN" altLang="en-US" smtClean="0"/>
-              <a:t>2025/11/14</a:t>
+              <a:t>2026/7/6</a:t>
             </a:fld>
             <a:endParaRPr lang="zh-CN" altLang="en-US"/>
           </a:p>
@@ -3620,7 +3618,7 @@
                 <a:latin typeface="Arial" panose="020B0604020202020204" pitchFamily="34" charset="0"/>
                 <a:cs typeface="Arial" panose="020B0604020202020204" pitchFamily="34" charset="0"/>
               </a:rPr>
-              <a:t>11/14/2025 10:54:57 AM</a:t>
+              <a:t>7/6/2026 6:22:11 PM</a:t>
             </a:fld>
             <a:endParaRPr lang="zh-CN" altLang="en-US" sz="1400" b="1" dirty="0">
               <a:solidFill>
@@ -3632,43 +3630,6 @@
           </a:p>
         </p:txBody>
       </p:sp>
-      <p:pic>
-        <p:nvPicPr>
-          <p:cNvPr id="2" name="图片 1" descr="徽标&#10;&#10;AI 生成的内容可能不正确。">
-            <a:extLst>
-              <a:ext uri="{FF2B5EF4-FFF2-40B4-BE49-F238E27FC236}">
-                <a16:creationId xmlns:a16="http://schemas.microsoft.com/office/drawing/2014/main" id="{5CC1B96B-F4FD-1310-5BA7-318A63CA8D5C}"/>
-              </a:ext>
-            </a:extLst>
-          </p:cNvPr>
-          <p:cNvPicPr>
-            <a:picLocks/>
-          </p:cNvPicPr>
-          <p:nvPr/>
-        </p:nvPicPr>
-        <p:blipFill>
-          <a:blip r:embed="rId2">
-            <a:extLst>
-              <a:ext uri="{28A0092B-C50C-407E-A947-70E740481C1C}">
-                <a14:useLocalDpi xmlns:a14="http://schemas.microsoft.com/office/drawing/2010/main" val="0"/>
-              </a:ext>
-            </a:extLst>
-          </a:blip>
-          <a:srcRect t="29985" b="27316"/>
-          <a:stretch>
-            <a:fillRect/>
-          </a:stretch>
-        </p:blipFill>
-        <p:spPr>
-          <a:xfrm>
-            <a:off x="184195" y="166221"/>
-            <a:ext cx="1741461" cy="688543"/>
-          </a:xfrm>
-          <a:prstGeom prst="rect">
-            <a:avLst/>
-          </a:prstGeom>
-        </p:spPr>
-      </p:pic>
     </p:spTree>
     <p:extLst>
       <p:ext uri="{BB962C8B-B14F-4D97-AF65-F5344CB8AC3E}">
@@ -3698,7 +3659,7 @@
         <p:cNvPr id="1" name="">
           <a:extLst>
             <a:ext uri="{FF2B5EF4-FFF2-40B4-BE49-F238E27FC236}">
-              <a16:creationId xmlns:a16="http://schemas.microsoft.com/office/drawing/2014/main" id="{E7A20043-3752-6B5B-403D-9898552D5545}"/>
+              <a16:creationId xmlns:a16="http://schemas.microsoft.com/office/drawing/2014/main" id="{8C3E3B45-CCB9-4C47-4066-6CF2606ED64A}"/>
             </a:ext>
           </a:extLst>
         </p:cNvPr>
@@ -3718,7 +3679,7 @@
           <p:cNvPr id="4" name="矩形 3">
             <a:extLst>
               <a:ext uri="{FF2B5EF4-FFF2-40B4-BE49-F238E27FC236}">
-                <a16:creationId xmlns:a16="http://schemas.microsoft.com/office/drawing/2014/main" id="{6D860C2E-D041-938F-7BF3-4F968BF8D321}"/>
+                <a16:creationId xmlns:a16="http://schemas.microsoft.com/office/drawing/2014/main" id="{B7770353-D84D-1ECA-D72B-2B275BC24BB3}"/>
               </a:ext>
             </a:extLst>
           </p:cNvPr>
@@ -3770,7 +3731,7 @@
           <p:cNvPr id="6" name="矩形 5">
             <a:extLst>
               <a:ext uri="{FF2B5EF4-FFF2-40B4-BE49-F238E27FC236}">
-                <a16:creationId xmlns:a16="http://schemas.microsoft.com/office/drawing/2014/main" id="{959AC269-712C-6EEF-0FE7-E187850D887E}"/>
+                <a16:creationId xmlns:a16="http://schemas.microsoft.com/office/drawing/2014/main" id="{D1BA7F92-D9CE-8A0C-B511-4C88D3ECEE48}"/>
               </a:ext>
             </a:extLst>
           </p:cNvPr>
@@ -3822,7 +3783,7 @@
           <p:cNvPr id="7" name="标题 1">
             <a:extLst>
               <a:ext uri="{FF2B5EF4-FFF2-40B4-BE49-F238E27FC236}">
-                <a16:creationId xmlns:a16="http://schemas.microsoft.com/office/drawing/2014/main" id="{78EB67BA-7F2B-3602-45FC-3077F436A0E4}"/>
+                <a16:creationId xmlns:a16="http://schemas.microsoft.com/office/drawing/2014/main" id="{4242F033-DCD9-F194-93B4-DC4D33BE030F}"/>
               </a:ext>
             </a:extLst>
           </p:cNvPr>
@@ -3874,47 +3835,10 @@
           </a:p>
         </p:txBody>
       </p:sp>
-      <p:pic>
-        <p:nvPicPr>
-          <p:cNvPr id="2" name="图片 1" descr="徽标&#10;&#10;AI 生成的内容可能不正确。">
-            <a:extLst>
-              <a:ext uri="{FF2B5EF4-FFF2-40B4-BE49-F238E27FC236}">
-                <a16:creationId xmlns:a16="http://schemas.microsoft.com/office/drawing/2014/main" id="{13C66E01-CEF4-4A60-178A-60CF8406C290}"/>
-              </a:ext>
-            </a:extLst>
-          </p:cNvPr>
-          <p:cNvPicPr>
-            <a:picLocks/>
-          </p:cNvPicPr>
-          <p:nvPr/>
-        </p:nvPicPr>
-        <p:blipFill>
-          <a:blip r:embed="rId2">
-            <a:extLst>
-              <a:ext uri="{28A0092B-C50C-407E-A947-70E740481C1C}">
-                <a14:useLocalDpi xmlns:a14="http://schemas.microsoft.com/office/drawing/2010/main" val="0"/>
-              </a:ext>
-            </a:extLst>
-          </a:blip>
-          <a:srcRect t="29985" b="27316"/>
-          <a:stretch>
-            <a:fillRect/>
-          </a:stretch>
-        </p:blipFill>
-        <p:spPr>
-          <a:xfrm>
-            <a:off x="184195" y="166221"/>
-            <a:ext cx="1741461" cy="688543"/>
-          </a:xfrm>
-          <a:prstGeom prst="rect">
-            <a:avLst/>
-          </a:prstGeom>
-        </p:spPr>
-      </p:pic>
     </p:spTree>
     <p:extLst>
       <p:ext uri="{BB962C8B-B14F-4D97-AF65-F5344CB8AC3E}">
-        <p14:creationId xmlns:p14="http://schemas.microsoft.com/office/powerpoint/2010/main" val="398481103"/>
+        <p14:creationId xmlns:p14="http://schemas.microsoft.com/office/powerpoint/2010/main" val="350244765"/>
       </p:ext>
     </p:extLst>
   </p:cSld>
@@ -3952,7 +3876,7 @@
         <p:cNvPr id="1" name="">
           <a:extLst>
             <a:ext uri="{FF2B5EF4-FFF2-40B4-BE49-F238E27FC236}">
-              <a16:creationId xmlns:a16="http://schemas.microsoft.com/office/drawing/2014/main" id="{8C3E3B45-CCB9-4C47-4066-6CF2606ED64A}"/>
+              <a16:creationId xmlns:a16="http://schemas.microsoft.com/office/drawing/2014/main" id="{B1ED2D43-DEE3-B75E-637B-B0F4B7AC9999}"/>
             </a:ext>
           </a:extLst>
         </p:cNvPr>
@@ -3972,7 +3896,7 @@
           <p:cNvPr id="4" name="矩形 3">
             <a:extLst>
               <a:ext uri="{FF2B5EF4-FFF2-40B4-BE49-F238E27FC236}">
-                <a16:creationId xmlns:a16="http://schemas.microsoft.com/office/drawing/2014/main" id="{B7770353-D84D-1ECA-D72B-2B275BC24BB3}"/>
+                <a16:creationId xmlns:a16="http://schemas.microsoft.com/office/drawing/2014/main" id="{30C7F41B-A665-5E04-71D6-3E29222DA6F3}"/>
               </a:ext>
             </a:extLst>
           </p:cNvPr>
@@ -4024,7 +3948,7 @@
           <p:cNvPr id="6" name="矩形 5">
             <a:extLst>
               <a:ext uri="{FF2B5EF4-FFF2-40B4-BE49-F238E27FC236}">
-                <a16:creationId xmlns:a16="http://schemas.microsoft.com/office/drawing/2014/main" id="{D1BA7F92-D9CE-8A0C-B511-4C88D3ECEE48}"/>
+                <a16:creationId xmlns:a16="http://schemas.microsoft.com/office/drawing/2014/main" id="{BD5B362D-720E-5B69-5579-842BC1C1A454}"/>
               </a:ext>
             </a:extLst>
           </p:cNvPr>
@@ -4076,7 +4000,7 @@
           <p:cNvPr id="7" name="标题 1">
             <a:extLst>
               <a:ext uri="{FF2B5EF4-FFF2-40B4-BE49-F238E27FC236}">
-                <a16:creationId xmlns:a16="http://schemas.microsoft.com/office/drawing/2014/main" id="{4242F033-DCD9-F194-93B4-DC4D33BE030F}"/>
+                <a16:creationId xmlns:a16="http://schemas.microsoft.com/office/drawing/2014/main" id="{D9D74187-D9FF-008C-4D63-99989B54BF30}"/>
               </a:ext>
             </a:extLst>
           </p:cNvPr>
@@ -4128,47 +4052,10 @@
           </a:p>
         </p:txBody>
       </p:sp>
-      <p:pic>
-        <p:nvPicPr>
-          <p:cNvPr id="2" name="图片 1" descr="徽标&#10;&#10;AI 生成的内容可能不正确。">
-            <a:extLst>
-              <a:ext uri="{FF2B5EF4-FFF2-40B4-BE49-F238E27FC236}">
-                <a16:creationId xmlns:a16="http://schemas.microsoft.com/office/drawing/2014/main" id="{6E82F45E-35AA-FBDA-9C6A-345E95D2DA9E}"/>
-              </a:ext>
-            </a:extLst>
-          </p:cNvPr>
-          <p:cNvPicPr>
-            <a:picLocks/>
-          </p:cNvPicPr>
-          <p:nvPr/>
-        </p:nvPicPr>
-        <p:blipFill>
-          <a:blip r:embed="rId2">
-            <a:extLst>
-              <a:ext uri="{28A0092B-C50C-407E-A947-70E740481C1C}">
-                <a14:useLocalDpi xmlns:a14="http://schemas.microsoft.com/office/drawing/2010/main" val="0"/>
-              </a:ext>
-            </a:extLst>
-          </a:blip>
-          <a:srcRect t="29985" b="27316"/>
-          <a:stretch>
-            <a:fillRect/>
-          </a:stretch>
-        </p:blipFill>
-        <p:spPr>
-          <a:xfrm>
-            <a:off x="184195" y="166221"/>
-            <a:ext cx="1741461" cy="688543"/>
-          </a:xfrm>
-          <a:prstGeom prst="rect">
-            <a:avLst/>
-          </a:prstGeom>
-        </p:spPr>
-      </p:pic>
     </p:spTree>
     <p:extLst>
       <p:ext uri="{BB962C8B-B14F-4D97-AF65-F5344CB8AC3E}">
-        <p14:creationId xmlns:p14="http://schemas.microsoft.com/office/powerpoint/2010/main" val="350244765"/>
+        <p14:creationId xmlns:p14="http://schemas.microsoft.com/office/powerpoint/2010/main" val="1071050765"/>
       </p:ext>
     </p:extLst>
   </p:cSld>
@@ -4206,7 +4093,7 @@
         <p:cNvPr id="1" name="">
           <a:extLst>
             <a:ext uri="{FF2B5EF4-FFF2-40B4-BE49-F238E27FC236}">
-              <a16:creationId xmlns:a16="http://schemas.microsoft.com/office/drawing/2014/main" id="{B1ED2D43-DEE3-B75E-637B-B0F4B7AC9999}"/>
+              <a16:creationId xmlns:a16="http://schemas.microsoft.com/office/drawing/2014/main" id="{5393E230-D23D-B963-D27F-CE6D0C2B79A5}"/>
             </a:ext>
           </a:extLst>
         </p:cNvPr>
@@ -4223,10 +4110,10 @@
       </p:grpSpPr>
       <p:sp>
         <p:nvSpPr>
-          <p:cNvPr id="4" name="矩形 3">
-            <a:extLst>
-              <a:ext uri="{FF2B5EF4-FFF2-40B4-BE49-F238E27FC236}">
-                <a16:creationId xmlns:a16="http://schemas.microsoft.com/office/drawing/2014/main" id="{30C7F41B-A665-5E04-71D6-3E29222DA6F3}"/>
+          <p:cNvPr id="9" name="矩形 8">
+            <a:extLst>
+              <a:ext uri="{FF2B5EF4-FFF2-40B4-BE49-F238E27FC236}">
+                <a16:creationId xmlns:a16="http://schemas.microsoft.com/office/drawing/2014/main" id="{9288221B-A446-666D-92CB-0F0BF1CDDC89}"/>
               </a:ext>
             </a:extLst>
           </p:cNvPr>
@@ -4235,8 +4122,8 @@
         </p:nvSpPr>
         <p:spPr>
           <a:xfrm>
-            <a:off x="0" y="944628"/>
-            <a:ext cx="2025283" cy="5913372"/>
+            <a:off x="0" y="4053249"/>
+            <a:ext cx="12192000" cy="2709193"/>
           </a:xfrm>
           <a:prstGeom prst="rect">
             <a:avLst/>
@@ -4269,16 +4156,20 @@
           <a:lstStyle/>
           <a:p>
             <a:pPr algn="ctr"/>
-            <a:endParaRPr lang="zh-CN" altLang="en-US"/>
-          </a:p>
-        </p:txBody>
-      </p:sp>
-      <p:sp>
-        <p:nvSpPr>
-          <p:cNvPr id="6" name="矩形 5">
-            <a:extLst>
-              <a:ext uri="{FF2B5EF4-FFF2-40B4-BE49-F238E27FC236}">
-                <a16:creationId xmlns:a16="http://schemas.microsoft.com/office/drawing/2014/main" id="{BD5B362D-720E-5B69-5579-842BC1C1A454}"/>
+            <a:r>
+              <a:rPr lang="en-US" altLang="zh-CN" dirty="0"/>
+              <a:t>·</a:t>
+            </a:r>
+            <a:endParaRPr lang="zh-CN" altLang="en-US" dirty="0"/>
+          </a:p>
+        </p:txBody>
+      </p:sp>
+      <p:sp>
+        <p:nvSpPr>
+          <p:cNvPr id="12" name="矩形 11">
+            <a:extLst>
+              <a:ext uri="{FF2B5EF4-FFF2-40B4-BE49-F238E27FC236}">
+                <a16:creationId xmlns:a16="http://schemas.microsoft.com/office/drawing/2014/main" id="{AA7A354F-AF57-7422-DDE5-81A1986399EE}"/>
               </a:ext>
             </a:extLst>
           </p:cNvPr>
@@ -4287,8 +4178,8 @@
         </p:nvSpPr>
         <p:spPr>
           <a:xfrm>
-            <a:off x="-1" y="1080655"/>
-            <a:ext cx="2025283" cy="5777345"/>
+            <a:off x="-50800" y="4148807"/>
+            <a:ext cx="12192000" cy="2709193"/>
           </a:xfrm>
           <a:prstGeom prst="rect">
             <a:avLst/>
@@ -4327,102 +4218,166 @@
       </p:sp>
       <p:sp>
         <p:nvSpPr>
-          <p:cNvPr id="7" name="标题 1">
-            <a:extLst>
-              <a:ext uri="{FF2B5EF4-FFF2-40B4-BE49-F238E27FC236}">
-                <a16:creationId xmlns:a16="http://schemas.microsoft.com/office/drawing/2014/main" id="{D9D74187-D9FF-008C-4D63-99989B54BF30}"/>
-              </a:ext>
-            </a:extLst>
-          </p:cNvPr>
-          <p:cNvSpPr txBox="1">
-            <a:spLocks/>
+          <p:cNvPr id="13" name="副标题 2">
+            <a:extLst>
+              <a:ext uri="{FF2B5EF4-FFF2-40B4-BE49-F238E27FC236}">
+                <a16:creationId xmlns:a16="http://schemas.microsoft.com/office/drawing/2014/main" id="{DD31E354-877F-B5F2-73B4-AA7F720A7A9D}"/>
+              </a:ext>
+            </a:extLst>
+          </p:cNvPr>
+          <p:cNvSpPr>
+            <a:spLocks noGrp="1"/>
+          </p:cNvSpPr>
+          <p:nvPr>
+            <p:ph type="subTitle" idx="1"/>
+          </p:nvPr>
+        </p:nvSpPr>
+        <p:spPr>
+          <a:xfrm>
+            <a:off x="8227751" y="4900655"/>
+            <a:ext cx="3517260" cy="1205494"/>
+          </a:xfrm>
+        </p:spPr>
+        <p:txBody>
+          <a:bodyPr>
+            <a:normAutofit/>
+          </a:bodyPr>
+          <a:lstStyle/>
+          <a:p>
+            <a:r>
+              <a:rPr lang="zh-CN" altLang="en-US" sz="3200" b="1" dirty="0">
+                <a:solidFill>
+                  <a:schemeClr val="bg1"/>
+                </a:solidFill>
+                <a:latin typeface="+mn-ea"/>
+              </a:rPr>
+              <a:t>设计遇到的</a:t>
+            </a:r>
+            <a:endParaRPr lang="en-US" altLang="zh-CN" sz="3200" b="1" dirty="0">
+              <a:solidFill>
+                <a:schemeClr val="bg1"/>
+              </a:solidFill>
+              <a:latin typeface="+mn-ea"/>
+            </a:endParaRPr>
+          </a:p>
+          <a:p>
+            <a:r>
+              <a:rPr lang="zh-CN" altLang="en-US" sz="3200" b="1" dirty="0">
+                <a:solidFill>
+                  <a:schemeClr val="bg1"/>
+                </a:solidFill>
+                <a:latin typeface="+mn-ea"/>
+              </a:rPr>
+              <a:t>不确定和难点</a:t>
+            </a:r>
+          </a:p>
+        </p:txBody>
+      </p:sp>
+      <p:sp>
+        <p:nvSpPr>
+          <p:cNvPr id="14" name="Text Placeholder 1">
+            <a:extLst>
+              <a:ext uri="{FF2B5EF4-FFF2-40B4-BE49-F238E27FC236}">
+                <a16:creationId xmlns:a16="http://schemas.microsoft.com/office/drawing/2014/main" id="{478FBE7A-40FE-3C72-D9B7-5F238B238B35}"/>
+              </a:ext>
+            </a:extLst>
+          </p:cNvPr>
+          <p:cNvSpPr>
+            <a:spLocks noChangeArrowheads="1"/>
           </p:cNvSpPr>
           <p:nvPr/>
         </p:nvSpPr>
-        <p:spPr>
-          <a:xfrm>
-            <a:off x="2231406" y="197312"/>
-            <a:ext cx="4412506" cy="647777"/>
+        <p:spPr bwMode="auto">
+          <a:xfrm>
+            <a:off x="184195" y="6106149"/>
+            <a:ext cx="5721796" cy="440494"/>
           </a:xfrm>
           <a:prstGeom prst="rect">
             <a:avLst/>
           </a:prstGeom>
-        </p:spPr>
-        <p:txBody>
-          <a:bodyPr vert="horz" lIns="91440" tIns="45720" rIns="91440" bIns="45720" rtlCol="0" anchor="ctr">
-            <a:normAutofit/>
-          </a:bodyPr>
-          <a:lstStyle>
-            <a:lvl1pPr algn="l" defTabSz="914400" rtl="0" eaLnBrk="1" latinLnBrk="0" hangingPunct="1">
-              <a:lnSpc>
-                <a:spcPct val="90000"/>
-              </a:lnSpc>
-              <a:spcBef>
-                <a:spcPct val="0"/>
-              </a:spcBef>
-              <a:buNone/>
-              <a:defRPr sz="4400" kern="1200">
+          <a:noFill/>
+          <a:ln w="9525">
+            <a:noFill/>
+            <a:bevel/>
+          </a:ln>
+        </p:spPr>
+        <p:txBody>
+          <a:bodyPr anchor="ctr"/>
+          <a:lstStyle/>
+          <a:p>
+            <a:pPr eaLnBrk="1" hangingPunct="1">
+              <a:defRPr/>
+            </a:pPr>
+            <a:r>
+              <a:rPr lang="en-US" altLang="zh-CN" sz="1400" b="1" dirty="0">
                 <a:solidFill>
-                  <a:schemeClr val="tx1"/>
+                  <a:srgbClr val="0096B4"/>
                 </a:solidFill>
-                <a:latin typeface="+mj-lt"/>
-                <a:ea typeface="+mj-ea"/>
-                <a:cs typeface="+mj-cs"/>
-              </a:defRPr>
-            </a:lvl1pPr>
-          </a:lstStyle>
-          <a:p>
-            <a:r>
-              <a:rPr lang="zh-CN" altLang="en-US" sz="4000" b="1" dirty="0">
-                <a:latin typeface="+mn-ea"/>
-                <a:ea typeface="+mn-ea"/>
+                <a:latin typeface="Arial" panose="020B0604020202020204" pitchFamily="34" charset="0"/>
+                <a:cs typeface="Arial" panose="020B0604020202020204" pitchFamily="34" charset="0"/>
               </a:rPr>
-              <a:t>设计创新点</a:t>
-            </a:r>
-          </a:p>
-        </p:txBody>
-      </p:sp>
-      <p:pic>
-        <p:nvPicPr>
-          <p:cNvPr id="2" name="图片 1" descr="徽标&#10;&#10;AI 生成的内容可能不正确。">
-            <a:extLst>
-              <a:ext uri="{FF2B5EF4-FFF2-40B4-BE49-F238E27FC236}">
-                <a16:creationId xmlns:a16="http://schemas.microsoft.com/office/drawing/2014/main" id="{CD2C38C8-149A-BDAE-8668-DA0517A8EF51}"/>
-              </a:ext>
-            </a:extLst>
-          </p:cNvPr>
-          <p:cNvPicPr>
-            <a:picLocks/>
-          </p:cNvPicPr>
+              <a:t>Prepared by AIR-Tech@ </a:t>
+            </a:r>
+            <a:fld id="{5853BA87-C0A4-4D40-A7D0-264FBDFF6174}" type="datetime9">
+              <a:rPr lang="en-US" altLang="zh-CN" sz="1400" b="1" dirty="0" smtClean="0">
+                <a:solidFill>
+                  <a:srgbClr val="0096B4"/>
+                </a:solidFill>
+                <a:latin typeface="Arial" panose="020B0604020202020204" pitchFamily="34" charset="0"/>
+                <a:cs typeface="Arial" panose="020B0604020202020204" pitchFamily="34" charset="0"/>
+              </a:rPr>
+              <a:t>7/6/2026 6:22:11 PM</a:t>
+            </a:fld>
+            <a:endParaRPr lang="zh-CN" altLang="en-US" sz="1400" b="1" dirty="0">
+              <a:solidFill>
+                <a:srgbClr val="0096B4"/>
+              </a:solidFill>
+              <a:latin typeface="Arial" panose="020B0604020202020204" pitchFamily="34" charset="0"/>
+              <a:cs typeface="Arial" panose="020B0604020202020204" pitchFamily="34" charset="0"/>
+            </a:endParaRPr>
+          </a:p>
+        </p:txBody>
+      </p:sp>
+      <p:sp>
+        <p:nvSpPr>
+          <p:cNvPr id="4" name="文本框 3">
+            <a:extLst>
+              <a:ext uri="{FF2B5EF4-FFF2-40B4-BE49-F238E27FC236}">
+                <a16:creationId xmlns:a16="http://schemas.microsoft.com/office/drawing/2014/main" id="{2F87A3EB-05B5-DA0C-754A-2BACB7C60432}"/>
+              </a:ext>
+            </a:extLst>
+          </p:cNvPr>
+          <p:cNvSpPr txBox="1"/>
           <p:nvPr/>
-        </p:nvPicPr>
-        <p:blipFill>
-          <a:blip r:embed="rId2">
-            <a:extLst>
-              <a:ext uri="{28A0092B-C50C-407E-A947-70E740481C1C}">
-                <a14:useLocalDpi xmlns:a14="http://schemas.microsoft.com/office/drawing/2010/main" val="0"/>
-              </a:ext>
-            </a:extLst>
-          </a:blip>
-          <a:srcRect t="29985" b="27316"/>
-          <a:stretch>
-            <a:fillRect/>
-          </a:stretch>
-        </p:blipFill>
-        <p:spPr>
-          <a:xfrm>
-            <a:off x="184195" y="166221"/>
-            <a:ext cx="1741461" cy="688543"/>
+        </p:nvSpPr>
+        <p:spPr>
+          <a:xfrm>
+            <a:off x="3045093" y="2249386"/>
+            <a:ext cx="6094902" cy="1015663"/>
           </a:xfrm>
           <a:prstGeom prst="rect">
             <a:avLst/>
           </a:prstGeom>
-        </p:spPr>
-      </p:pic>
+          <a:noFill/>
+        </p:spPr>
+        <p:txBody>
+          <a:bodyPr wrap="square">
+            <a:spAutoFit/>
+          </a:bodyPr>
+          <a:lstStyle/>
+          <a:p>
+            <a:pPr algn="ctr"/>
+            <a:r>
+              <a:rPr lang="zh-CN" altLang="en-US" sz="6000" b="1" dirty="0"/>
+              <a:t>主要设计难点</a:t>
+            </a:r>
+          </a:p>
+        </p:txBody>
+      </p:sp>
     </p:spTree>
     <p:extLst>
       <p:ext uri="{BB962C8B-B14F-4D97-AF65-F5344CB8AC3E}">
-        <p14:creationId xmlns:p14="http://schemas.microsoft.com/office/powerpoint/2010/main" val="1071050765"/>
+        <p14:creationId xmlns:p14="http://schemas.microsoft.com/office/powerpoint/2010/main" val="3047416960"/>
       </p:ext>
     </p:extLst>
   </p:cSld>
@@ -4460,7 +4415,7 @@
         <p:cNvPr id="1" name="">
           <a:extLst>
             <a:ext uri="{FF2B5EF4-FFF2-40B4-BE49-F238E27FC236}">
-              <a16:creationId xmlns:a16="http://schemas.microsoft.com/office/drawing/2014/main" id="{5393E230-D23D-B963-D27F-CE6D0C2B79A5}"/>
+              <a16:creationId xmlns:a16="http://schemas.microsoft.com/office/drawing/2014/main" id="{05C4C00F-8887-D131-E19F-062507C39D7A}"/>
             </a:ext>
           </a:extLst>
         </p:cNvPr>
@@ -4477,10 +4432,10 @@
       </p:grpSpPr>
       <p:sp>
         <p:nvSpPr>
-          <p:cNvPr id="9" name="矩形 8">
-            <a:extLst>
-              <a:ext uri="{FF2B5EF4-FFF2-40B4-BE49-F238E27FC236}">
-                <a16:creationId xmlns:a16="http://schemas.microsoft.com/office/drawing/2014/main" id="{9288221B-A446-666D-92CB-0F0BF1CDDC89}"/>
+          <p:cNvPr id="4" name="矩形 3">
+            <a:extLst>
+              <a:ext uri="{FF2B5EF4-FFF2-40B4-BE49-F238E27FC236}">
+                <a16:creationId xmlns:a16="http://schemas.microsoft.com/office/drawing/2014/main" id="{5D838823-4074-60FD-918B-DE20F96E103C}"/>
               </a:ext>
             </a:extLst>
           </p:cNvPr>
@@ -4489,8 +4444,8 @@
         </p:nvSpPr>
         <p:spPr>
           <a:xfrm>
-            <a:off x="0" y="4053249"/>
-            <a:ext cx="12192000" cy="2709193"/>
+            <a:off x="0" y="944628"/>
+            <a:ext cx="2025283" cy="5913372"/>
           </a:xfrm>
           <a:prstGeom prst="rect">
             <a:avLst/>
@@ -4523,20 +4478,16 @@
           <a:lstStyle/>
           <a:p>
             <a:pPr algn="ctr"/>
-            <a:r>
-              <a:rPr lang="en-US" altLang="zh-CN" dirty="0"/>
-              <a:t>·</a:t>
-            </a:r>
-            <a:endParaRPr lang="zh-CN" altLang="en-US" dirty="0"/>
-          </a:p>
-        </p:txBody>
-      </p:sp>
-      <p:sp>
-        <p:nvSpPr>
-          <p:cNvPr id="12" name="矩形 11">
-            <a:extLst>
-              <a:ext uri="{FF2B5EF4-FFF2-40B4-BE49-F238E27FC236}">
-                <a16:creationId xmlns:a16="http://schemas.microsoft.com/office/drawing/2014/main" id="{AA7A354F-AF57-7422-DDE5-81A1986399EE}"/>
+            <a:endParaRPr lang="zh-CN" altLang="en-US"/>
+          </a:p>
+        </p:txBody>
+      </p:sp>
+      <p:sp>
+        <p:nvSpPr>
+          <p:cNvPr id="6" name="矩形 5">
+            <a:extLst>
+              <a:ext uri="{FF2B5EF4-FFF2-40B4-BE49-F238E27FC236}">
+                <a16:creationId xmlns:a16="http://schemas.microsoft.com/office/drawing/2014/main" id="{EC14F729-D65E-9381-2DF8-4FE946E3DAA0}"/>
               </a:ext>
             </a:extLst>
           </p:cNvPr>
@@ -4545,8 +4496,8 @@
         </p:nvSpPr>
         <p:spPr>
           <a:xfrm>
-            <a:off x="-50800" y="4148807"/>
-            <a:ext cx="12192000" cy="2709193"/>
+            <a:off x="-1" y="1080655"/>
+            <a:ext cx="2025283" cy="5777345"/>
           </a:xfrm>
           <a:prstGeom prst="rect">
             <a:avLst/>
@@ -4585,203 +4536,65 @@
       </p:sp>
       <p:sp>
         <p:nvSpPr>
-          <p:cNvPr id="13" name="副标题 2">
-            <a:extLst>
-              <a:ext uri="{FF2B5EF4-FFF2-40B4-BE49-F238E27FC236}">
-                <a16:creationId xmlns:a16="http://schemas.microsoft.com/office/drawing/2014/main" id="{DD31E354-877F-B5F2-73B4-AA7F720A7A9D}"/>
-              </a:ext>
-            </a:extLst>
-          </p:cNvPr>
-          <p:cNvSpPr>
-            <a:spLocks noGrp="1"/>
-          </p:cNvSpPr>
-          <p:nvPr>
-            <p:ph type="subTitle" idx="1"/>
-          </p:nvPr>
-        </p:nvSpPr>
-        <p:spPr>
-          <a:xfrm>
-            <a:off x="8227751" y="4900655"/>
-            <a:ext cx="3517260" cy="1205494"/>
-          </a:xfrm>
-        </p:spPr>
-        <p:txBody>
-          <a:bodyPr>
-            <a:normAutofit/>
-          </a:bodyPr>
-          <a:lstStyle/>
-          <a:p>
-            <a:r>
-              <a:rPr lang="zh-CN" altLang="en-US" sz="3200" b="1" dirty="0">
-                <a:solidFill>
-                  <a:schemeClr val="bg1"/>
-                </a:solidFill>
-                <a:latin typeface="+mn-ea"/>
-              </a:rPr>
-              <a:t>设计遇到的</a:t>
-            </a:r>
-            <a:endParaRPr lang="en-US" altLang="zh-CN" sz="3200" b="1" dirty="0">
-              <a:solidFill>
-                <a:schemeClr val="bg1"/>
-              </a:solidFill>
-              <a:latin typeface="+mn-ea"/>
-            </a:endParaRPr>
-          </a:p>
-          <a:p>
-            <a:r>
-              <a:rPr lang="zh-CN" altLang="en-US" sz="3200" b="1" dirty="0">
-                <a:solidFill>
-                  <a:schemeClr val="bg1"/>
-                </a:solidFill>
-                <a:latin typeface="+mn-ea"/>
-              </a:rPr>
-              <a:t>不确定和难点</a:t>
-            </a:r>
-          </a:p>
-        </p:txBody>
-      </p:sp>
-      <p:sp>
-        <p:nvSpPr>
-          <p:cNvPr id="14" name="Text Placeholder 1">
-            <a:extLst>
-              <a:ext uri="{FF2B5EF4-FFF2-40B4-BE49-F238E27FC236}">
-                <a16:creationId xmlns:a16="http://schemas.microsoft.com/office/drawing/2014/main" id="{478FBE7A-40FE-3C72-D9B7-5F238B238B35}"/>
-              </a:ext>
-            </a:extLst>
-          </p:cNvPr>
-          <p:cNvSpPr>
-            <a:spLocks noChangeArrowheads="1"/>
+          <p:cNvPr id="7" name="标题 1">
+            <a:extLst>
+              <a:ext uri="{FF2B5EF4-FFF2-40B4-BE49-F238E27FC236}">
+                <a16:creationId xmlns:a16="http://schemas.microsoft.com/office/drawing/2014/main" id="{3B989CFC-3E03-0F59-D0E9-0CAA82EC17A0}"/>
+              </a:ext>
+            </a:extLst>
+          </p:cNvPr>
+          <p:cNvSpPr txBox="1">
+            <a:spLocks/>
           </p:cNvSpPr>
           <p:nvPr/>
         </p:nvSpPr>
-        <p:spPr bwMode="auto">
-          <a:xfrm>
-            <a:off x="184195" y="6106149"/>
-            <a:ext cx="5721796" cy="440494"/>
+        <p:spPr>
+          <a:xfrm>
+            <a:off x="2231406" y="197312"/>
+            <a:ext cx="4412506" cy="647777"/>
           </a:xfrm>
           <a:prstGeom prst="rect">
             <a:avLst/>
           </a:prstGeom>
-          <a:noFill/>
-          <a:ln w="9525">
-            <a:noFill/>
-            <a:bevel/>
-          </a:ln>
-        </p:spPr>
-        <p:txBody>
-          <a:bodyPr anchor="ctr"/>
-          <a:lstStyle/>
-          <a:p>
-            <a:pPr eaLnBrk="1" hangingPunct="1">
-              <a:defRPr/>
-            </a:pPr>
-            <a:r>
-              <a:rPr lang="en-US" altLang="zh-CN" sz="1400" b="1" dirty="0">
+        </p:spPr>
+        <p:txBody>
+          <a:bodyPr vert="horz" lIns="91440" tIns="45720" rIns="91440" bIns="45720" rtlCol="0" anchor="ctr">
+            <a:normAutofit/>
+          </a:bodyPr>
+          <a:lstStyle>
+            <a:lvl1pPr algn="l" defTabSz="914400" rtl="0" eaLnBrk="1" latinLnBrk="0" hangingPunct="1">
+              <a:lnSpc>
+                <a:spcPct val="90000"/>
+              </a:lnSpc>
+              <a:spcBef>
+                <a:spcPct val="0"/>
+              </a:spcBef>
+              <a:buNone/>
+              <a:defRPr sz="4400" kern="1200">
                 <a:solidFill>
-                  <a:srgbClr val="0096B4"/>
+                  <a:schemeClr val="tx1"/>
                 </a:solidFill>
-                <a:latin typeface="Arial" panose="020B0604020202020204" pitchFamily="34" charset="0"/>
-                <a:cs typeface="Arial" panose="020B0604020202020204" pitchFamily="34" charset="0"/>
+                <a:latin typeface="+mj-lt"/>
+                <a:ea typeface="+mj-ea"/>
+                <a:cs typeface="+mj-cs"/>
+              </a:defRPr>
+            </a:lvl1pPr>
+          </a:lstStyle>
+          <a:p>
+            <a:r>
+              <a:rPr lang="zh-CN" altLang="en-US" sz="4000" b="1" dirty="0">
+                <a:latin typeface="+mn-ea"/>
+                <a:ea typeface="+mn-ea"/>
               </a:rPr>
-              <a:t>Prepared by AIR-Tech@ </a:t>
-            </a:r>
-            <a:fld id="{5853BA87-C0A4-4D40-A7D0-264FBDFF6174}" type="datetime9">
-              <a:rPr lang="en-US" altLang="zh-CN" sz="1400" b="1" dirty="0" smtClean="0">
-                <a:solidFill>
-                  <a:srgbClr val="0096B4"/>
-                </a:solidFill>
-                <a:latin typeface="Arial" panose="020B0604020202020204" pitchFamily="34" charset="0"/>
-                <a:cs typeface="Arial" panose="020B0604020202020204" pitchFamily="34" charset="0"/>
-              </a:rPr>
-              <a:t>11/14/2025 10:58:08 AM</a:t>
-            </a:fld>
-            <a:endParaRPr lang="zh-CN" altLang="en-US" sz="1400" b="1" dirty="0">
-              <a:solidFill>
-                <a:srgbClr val="0096B4"/>
-              </a:solidFill>
-              <a:latin typeface="Arial" panose="020B0604020202020204" pitchFamily="34" charset="0"/>
-              <a:cs typeface="Arial" panose="020B0604020202020204" pitchFamily="34" charset="0"/>
-            </a:endParaRPr>
-          </a:p>
-        </p:txBody>
-      </p:sp>
-      <p:sp>
-        <p:nvSpPr>
-          <p:cNvPr id="4" name="文本框 3">
-            <a:extLst>
-              <a:ext uri="{FF2B5EF4-FFF2-40B4-BE49-F238E27FC236}">
-                <a16:creationId xmlns:a16="http://schemas.microsoft.com/office/drawing/2014/main" id="{2F87A3EB-05B5-DA0C-754A-2BACB7C60432}"/>
-              </a:ext>
-            </a:extLst>
-          </p:cNvPr>
-          <p:cNvSpPr txBox="1"/>
-          <p:nvPr/>
-        </p:nvSpPr>
-        <p:spPr>
-          <a:xfrm>
-            <a:off x="3045093" y="2249386"/>
-            <a:ext cx="6094902" cy="1015663"/>
-          </a:xfrm>
-          <a:prstGeom prst="rect">
-            <a:avLst/>
-          </a:prstGeom>
-          <a:noFill/>
-        </p:spPr>
-        <p:txBody>
-          <a:bodyPr wrap="square">
-            <a:spAutoFit/>
-          </a:bodyPr>
-          <a:lstStyle/>
-          <a:p>
-            <a:pPr algn="ctr"/>
-            <a:r>
-              <a:rPr lang="zh-CN" altLang="en-US" sz="6000" b="1" dirty="0"/>
               <a:t>主要设计难点</a:t>
             </a:r>
           </a:p>
         </p:txBody>
       </p:sp>
-      <p:pic>
-        <p:nvPicPr>
-          <p:cNvPr id="2" name="图片 1" descr="徽标&#10;&#10;AI 生成的内容可能不正确。">
-            <a:extLst>
-              <a:ext uri="{FF2B5EF4-FFF2-40B4-BE49-F238E27FC236}">
-                <a16:creationId xmlns:a16="http://schemas.microsoft.com/office/drawing/2014/main" id="{AA3F957F-24AE-94C9-BF68-E0C0B7232515}"/>
-              </a:ext>
-            </a:extLst>
-          </p:cNvPr>
-          <p:cNvPicPr>
-            <a:picLocks/>
-          </p:cNvPicPr>
-          <p:nvPr/>
-        </p:nvPicPr>
-        <p:blipFill>
-          <a:blip r:embed="rId2">
-            <a:extLst>
-              <a:ext uri="{28A0092B-C50C-407E-A947-70E740481C1C}">
-                <a14:useLocalDpi xmlns:a14="http://schemas.microsoft.com/office/drawing/2010/main" val="0"/>
-              </a:ext>
-            </a:extLst>
-          </a:blip>
-          <a:srcRect t="29985" b="27316"/>
-          <a:stretch>
-            <a:fillRect/>
-          </a:stretch>
-        </p:blipFill>
-        <p:spPr>
-          <a:xfrm>
-            <a:off x="184195" y="166221"/>
-            <a:ext cx="1741461" cy="688543"/>
-          </a:xfrm>
-          <a:prstGeom prst="rect">
-            <a:avLst/>
-          </a:prstGeom>
-        </p:spPr>
-      </p:pic>
     </p:spTree>
     <p:extLst>
       <p:ext uri="{BB962C8B-B14F-4D97-AF65-F5344CB8AC3E}">
-        <p14:creationId xmlns:p14="http://schemas.microsoft.com/office/powerpoint/2010/main" val="3047416960"/>
+        <p14:creationId xmlns:p14="http://schemas.microsoft.com/office/powerpoint/2010/main" val="3306696841"/>
       </p:ext>
     </p:extLst>
   </p:cSld>
@@ -4819,7 +4632,7 @@
         <p:cNvPr id="1" name="">
           <a:extLst>
             <a:ext uri="{FF2B5EF4-FFF2-40B4-BE49-F238E27FC236}">
-              <a16:creationId xmlns:a16="http://schemas.microsoft.com/office/drawing/2014/main" id="{FFADB015-7DC2-4F08-710E-193AC6B81F24}"/>
+              <a16:creationId xmlns:a16="http://schemas.microsoft.com/office/drawing/2014/main" id="{AFD5C2AF-556B-9621-BD57-FBFA6AA27DE6}"/>
             </a:ext>
           </a:extLst>
         </p:cNvPr>
@@ -4839,7 +4652,7 @@
           <p:cNvPr id="4" name="矩形 3">
             <a:extLst>
               <a:ext uri="{FF2B5EF4-FFF2-40B4-BE49-F238E27FC236}">
-                <a16:creationId xmlns:a16="http://schemas.microsoft.com/office/drawing/2014/main" id="{94B1F38C-5B59-6582-F138-A9D5667D8250}"/>
+                <a16:creationId xmlns:a16="http://schemas.microsoft.com/office/drawing/2014/main" id="{B0D78FB6-091F-2022-9C78-EB7F20D26C08}"/>
               </a:ext>
             </a:extLst>
           </p:cNvPr>
@@ -4891,7 +4704,7 @@
           <p:cNvPr id="6" name="矩形 5">
             <a:extLst>
               <a:ext uri="{FF2B5EF4-FFF2-40B4-BE49-F238E27FC236}">
-                <a16:creationId xmlns:a16="http://schemas.microsoft.com/office/drawing/2014/main" id="{14B2C2D2-DA16-5F2D-B086-7531318C0D89}"/>
+                <a16:creationId xmlns:a16="http://schemas.microsoft.com/office/drawing/2014/main" id="{BADB9CEB-AFB3-56FC-C858-B8B43A79F521}"/>
               </a:ext>
             </a:extLst>
           </p:cNvPr>
@@ -4900,7 +4713,7 @@
         </p:nvSpPr>
         <p:spPr>
           <a:xfrm>
-            <a:off x="-1" y="1080655"/>
+            <a:off x="0" y="1080655"/>
             <a:ext cx="2025283" cy="5777345"/>
           </a:xfrm>
           <a:prstGeom prst="rect">
@@ -4943,7 +4756,7 @@
           <p:cNvPr id="7" name="标题 1">
             <a:extLst>
               <a:ext uri="{FF2B5EF4-FFF2-40B4-BE49-F238E27FC236}">
-                <a16:creationId xmlns:a16="http://schemas.microsoft.com/office/drawing/2014/main" id="{D64B9A6A-1F5A-CA42-95E8-90BF5132E32D}"/>
+                <a16:creationId xmlns:a16="http://schemas.microsoft.com/office/drawing/2014/main" id="{85772F1B-21CC-FF92-08CE-8CD64AD83E53}"/>
               </a:ext>
             </a:extLst>
           </p:cNvPr>
@@ -4995,47 +4808,10 @@
           </a:p>
         </p:txBody>
       </p:sp>
-      <p:pic>
-        <p:nvPicPr>
-          <p:cNvPr id="2" name="图片 1" descr="徽标&#10;&#10;AI 生成的内容可能不正确。">
-            <a:extLst>
-              <a:ext uri="{FF2B5EF4-FFF2-40B4-BE49-F238E27FC236}">
-                <a16:creationId xmlns:a16="http://schemas.microsoft.com/office/drawing/2014/main" id="{B5061354-F9A3-2BE0-ED9C-76C0BCCB0434}"/>
-              </a:ext>
-            </a:extLst>
-          </p:cNvPr>
-          <p:cNvPicPr>
-            <a:picLocks/>
-          </p:cNvPicPr>
-          <p:nvPr/>
-        </p:nvPicPr>
-        <p:blipFill>
-          <a:blip r:embed="rId2">
-            <a:extLst>
-              <a:ext uri="{28A0092B-C50C-407E-A947-70E740481C1C}">
-                <a14:useLocalDpi xmlns:a14="http://schemas.microsoft.com/office/drawing/2010/main" val="0"/>
-              </a:ext>
-            </a:extLst>
-          </a:blip>
-          <a:srcRect t="29985" b="27316"/>
-          <a:stretch>
-            <a:fillRect/>
-          </a:stretch>
-        </p:blipFill>
-        <p:spPr>
-          <a:xfrm>
-            <a:off x="184195" y="166221"/>
-            <a:ext cx="1741461" cy="688543"/>
-          </a:xfrm>
-          <a:prstGeom prst="rect">
-            <a:avLst/>
-          </a:prstGeom>
-        </p:spPr>
-      </p:pic>
     </p:spTree>
     <p:extLst>
       <p:ext uri="{BB962C8B-B14F-4D97-AF65-F5344CB8AC3E}">
-        <p14:creationId xmlns:p14="http://schemas.microsoft.com/office/powerpoint/2010/main" val="240580140"/>
+        <p14:creationId xmlns:p14="http://schemas.microsoft.com/office/powerpoint/2010/main" val="2300556188"/>
       </p:ext>
     </p:extLst>
   </p:cSld>
@@ -5073,7 +4849,7 @@
         <p:cNvPr id="1" name="">
           <a:extLst>
             <a:ext uri="{FF2B5EF4-FFF2-40B4-BE49-F238E27FC236}">
-              <a16:creationId xmlns:a16="http://schemas.microsoft.com/office/drawing/2014/main" id="{05C4C00F-8887-D131-E19F-062507C39D7A}"/>
+              <a16:creationId xmlns:a16="http://schemas.microsoft.com/office/drawing/2014/main" id="{5664D61C-98BC-1000-D73F-057D499198A6}"/>
             </a:ext>
           </a:extLst>
         </p:cNvPr>
@@ -5093,7 +4869,7 @@
           <p:cNvPr id="4" name="矩形 3">
             <a:extLst>
               <a:ext uri="{FF2B5EF4-FFF2-40B4-BE49-F238E27FC236}">
-                <a16:creationId xmlns:a16="http://schemas.microsoft.com/office/drawing/2014/main" id="{5D838823-4074-60FD-918B-DE20F96E103C}"/>
+                <a16:creationId xmlns:a16="http://schemas.microsoft.com/office/drawing/2014/main" id="{3B0E8B1B-EAA7-F736-1500-1CA149A1E8DD}"/>
               </a:ext>
             </a:extLst>
           </p:cNvPr>
@@ -5145,7 +4921,7 @@
           <p:cNvPr id="6" name="矩形 5">
             <a:extLst>
               <a:ext uri="{FF2B5EF4-FFF2-40B4-BE49-F238E27FC236}">
-                <a16:creationId xmlns:a16="http://schemas.microsoft.com/office/drawing/2014/main" id="{EC14F729-D65E-9381-2DF8-4FE946E3DAA0}"/>
+                <a16:creationId xmlns:a16="http://schemas.microsoft.com/office/drawing/2014/main" id="{C08E07A2-384C-ACA1-2AA8-0EFE0C555FBF}"/>
               </a:ext>
             </a:extLst>
           </p:cNvPr>
@@ -5197,7 +4973,7 @@
           <p:cNvPr id="7" name="标题 1">
             <a:extLst>
               <a:ext uri="{FF2B5EF4-FFF2-40B4-BE49-F238E27FC236}">
-                <a16:creationId xmlns:a16="http://schemas.microsoft.com/office/drawing/2014/main" id="{3B989CFC-3E03-0F59-D0E9-0CAA82EC17A0}"/>
+                <a16:creationId xmlns:a16="http://schemas.microsoft.com/office/drawing/2014/main" id="{20C251A3-3BA2-59F8-0319-81AA282CB128}"/>
               </a:ext>
             </a:extLst>
           </p:cNvPr>
@@ -5249,47 +5025,10 @@
           </a:p>
         </p:txBody>
       </p:sp>
-      <p:pic>
-        <p:nvPicPr>
-          <p:cNvPr id="2" name="图片 1" descr="徽标&#10;&#10;AI 生成的内容可能不正确。">
-            <a:extLst>
-              <a:ext uri="{FF2B5EF4-FFF2-40B4-BE49-F238E27FC236}">
-                <a16:creationId xmlns:a16="http://schemas.microsoft.com/office/drawing/2014/main" id="{7E76806C-5B39-1A83-00B9-CD912A7B7456}"/>
-              </a:ext>
-            </a:extLst>
-          </p:cNvPr>
-          <p:cNvPicPr>
-            <a:picLocks/>
-          </p:cNvPicPr>
-          <p:nvPr/>
-        </p:nvPicPr>
-        <p:blipFill>
-          <a:blip r:embed="rId2">
-            <a:extLst>
-              <a:ext uri="{28A0092B-C50C-407E-A947-70E740481C1C}">
-                <a14:useLocalDpi xmlns:a14="http://schemas.microsoft.com/office/drawing/2010/main" val="0"/>
-              </a:ext>
-            </a:extLst>
-          </a:blip>
-          <a:srcRect t="29985" b="27316"/>
-          <a:stretch>
-            <a:fillRect/>
-          </a:stretch>
-        </p:blipFill>
-        <p:spPr>
-          <a:xfrm>
-            <a:off x="184195" y="166221"/>
-            <a:ext cx="1741461" cy="688543"/>
-          </a:xfrm>
-          <a:prstGeom prst="rect">
-            <a:avLst/>
-          </a:prstGeom>
-        </p:spPr>
-      </p:pic>
     </p:spTree>
     <p:extLst>
       <p:ext uri="{BB962C8B-B14F-4D97-AF65-F5344CB8AC3E}">
-        <p14:creationId xmlns:p14="http://schemas.microsoft.com/office/powerpoint/2010/main" val="3306696841"/>
+        <p14:creationId xmlns:p14="http://schemas.microsoft.com/office/powerpoint/2010/main" val="3393810164"/>
       </p:ext>
     </p:extLst>
   </p:cSld>
@@ -5327,7 +5066,7 @@
         <p:cNvPr id="1" name="">
           <a:extLst>
             <a:ext uri="{FF2B5EF4-FFF2-40B4-BE49-F238E27FC236}">
-              <a16:creationId xmlns:a16="http://schemas.microsoft.com/office/drawing/2014/main" id="{AFD5C2AF-556B-9621-BD57-FBFA6AA27DE6}"/>
+              <a16:creationId xmlns:a16="http://schemas.microsoft.com/office/drawing/2014/main" id="{996B166B-DF22-82F8-A374-B42F4283E0D2}"/>
             </a:ext>
           </a:extLst>
         </p:cNvPr>
@@ -5344,10 +5083,10 @@
       </p:grpSpPr>
       <p:sp>
         <p:nvSpPr>
-          <p:cNvPr id="4" name="矩形 3">
-            <a:extLst>
-              <a:ext uri="{FF2B5EF4-FFF2-40B4-BE49-F238E27FC236}">
-                <a16:creationId xmlns:a16="http://schemas.microsoft.com/office/drawing/2014/main" id="{B0D78FB6-091F-2022-9C78-EB7F20D26C08}"/>
+          <p:cNvPr id="9" name="矩形 8">
+            <a:extLst>
+              <a:ext uri="{FF2B5EF4-FFF2-40B4-BE49-F238E27FC236}">
+                <a16:creationId xmlns:a16="http://schemas.microsoft.com/office/drawing/2014/main" id="{AB853696-25E0-648F-25C1-4C1C045C864A}"/>
               </a:ext>
             </a:extLst>
           </p:cNvPr>
@@ -5356,8 +5095,8 @@
         </p:nvSpPr>
         <p:spPr>
           <a:xfrm>
-            <a:off x="0" y="944628"/>
-            <a:ext cx="2025283" cy="5913372"/>
+            <a:off x="0" y="4053249"/>
+            <a:ext cx="12192000" cy="2709193"/>
           </a:xfrm>
           <a:prstGeom prst="rect">
             <a:avLst/>
@@ -5390,16 +5129,20 @@
           <a:lstStyle/>
           <a:p>
             <a:pPr algn="ctr"/>
-            <a:endParaRPr lang="zh-CN" altLang="en-US"/>
-          </a:p>
-        </p:txBody>
-      </p:sp>
-      <p:sp>
-        <p:nvSpPr>
-          <p:cNvPr id="6" name="矩形 5">
-            <a:extLst>
-              <a:ext uri="{FF2B5EF4-FFF2-40B4-BE49-F238E27FC236}">
-                <a16:creationId xmlns:a16="http://schemas.microsoft.com/office/drawing/2014/main" id="{BADB9CEB-AFB3-56FC-C858-B8B43A79F521}"/>
+            <a:r>
+              <a:rPr lang="en-US" altLang="zh-CN" dirty="0"/>
+              <a:t>·</a:t>
+            </a:r>
+            <a:endParaRPr lang="zh-CN" altLang="en-US" dirty="0"/>
+          </a:p>
+        </p:txBody>
+      </p:sp>
+      <p:sp>
+        <p:nvSpPr>
+          <p:cNvPr id="12" name="矩形 11">
+            <a:extLst>
+              <a:ext uri="{FF2B5EF4-FFF2-40B4-BE49-F238E27FC236}">
+                <a16:creationId xmlns:a16="http://schemas.microsoft.com/office/drawing/2014/main" id="{1A2F2127-8289-3911-873B-B8B458DCDD53}"/>
               </a:ext>
             </a:extLst>
           </p:cNvPr>
@@ -5408,8 +5151,8 @@
         </p:nvSpPr>
         <p:spPr>
           <a:xfrm>
-            <a:off x="0" y="1080655"/>
-            <a:ext cx="2025283" cy="5777345"/>
+            <a:off x="0" y="4148807"/>
+            <a:ext cx="12192000" cy="2709193"/>
           </a:xfrm>
           <a:prstGeom prst="rect">
             <a:avLst/>
@@ -5448,102 +5191,149 @@
       </p:sp>
       <p:sp>
         <p:nvSpPr>
-          <p:cNvPr id="7" name="标题 1">
-            <a:extLst>
-              <a:ext uri="{FF2B5EF4-FFF2-40B4-BE49-F238E27FC236}">
-                <a16:creationId xmlns:a16="http://schemas.microsoft.com/office/drawing/2014/main" id="{85772F1B-21CC-FF92-08CE-8CD64AD83E53}"/>
-              </a:ext>
-            </a:extLst>
-          </p:cNvPr>
-          <p:cNvSpPr txBox="1">
-            <a:spLocks/>
+          <p:cNvPr id="13" name="副标题 2">
+            <a:extLst>
+              <a:ext uri="{FF2B5EF4-FFF2-40B4-BE49-F238E27FC236}">
+                <a16:creationId xmlns:a16="http://schemas.microsoft.com/office/drawing/2014/main" id="{D0674884-996F-82E0-017A-4ECABC69ECB0}"/>
+              </a:ext>
+            </a:extLst>
+          </p:cNvPr>
+          <p:cNvSpPr>
+            <a:spLocks noGrp="1"/>
+          </p:cNvSpPr>
+          <p:nvPr>
+            <p:ph type="subTitle" idx="1"/>
+          </p:nvPr>
+        </p:nvSpPr>
+        <p:spPr>
+          <a:xfrm>
+            <a:off x="8227751" y="4900655"/>
+            <a:ext cx="3517260" cy="1205494"/>
+          </a:xfrm>
+        </p:spPr>
+        <p:txBody>
+          <a:bodyPr>
+            <a:normAutofit/>
+          </a:bodyPr>
+          <a:lstStyle/>
+          <a:p>
+            <a:r>
+              <a:rPr lang="zh-CN" altLang="en-US" sz="3200" b="1" dirty="0">
+                <a:solidFill>
+                  <a:schemeClr val="bg1"/>
+                </a:solidFill>
+                <a:latin typeface="+mn-ea"/>
+              </a:rPr>
+              <a:t>接下来需要做部分未达到的遗憾</a:t>
+            </a:r>
+          </a:p>
+        </p:txBody>
+      </p:sp>
+      <p:sp>
+        <p:nvSpPr>
+          <p:cNvPr id="14" name="Text Placeholder 1">
+            <a:extLst>
+              <a:ext uri="{FF2B5EF4-FFF2-40B4-BE49-F238E27FC236}">
+                <a16:creationId xmlns:a16="http://schemas.microsoft.com/office/drawing/2014/main" id="{5A6E5C74-36FF-DC30-7F88-FEE1AE672704}"/>
+              </a:ext>
+            </a:extLst>
+          </p:cNvPr>
+          <p:cNvSpPr>
+            <a:spLocks noChangeArrowheads="1"/>
           </p:cNvSpPr>
           <p:nvPr/>
         </p:nvSpPr>
-        <p:spPr>
-          <a:xfrm>
-            <a:off x="2231406" y="197312"/>
-            <a:ext cx="4412506" cy="647777"/>
+        <p:spPr bwMode="auto">
+          <a:xfrm>
+            <a:off x="184195" y="6106149"/>
+            <a:ext cx="5721796" cy="440494"/>
           </a:xfrm>
           <a:prstGeom prst="rect">
             <a:avLst/>
           </a:prstGeom>
-        </p:spPr>
-        <p:txBody>
-          <a:bodyPr vert="horz" lIns="91440" tIns="45720" rIns="91440" bIns="45720" rtlCol="0" anchor="ctr">
-            <a:normAutofit/>
-          </a:bodyPr>
-          <a:lstStyle>
-            <a:lvl1pPr algn="l" defTabSz="914400" rtl="0" eaLnBrk="1" latinLnBrk="0" hangingPunct="1">
-              <a:lnSpc>
-                <a:spcPct val="90000"/>
-              </a:lnSpc>
-              <a:spcBef>
-                <a:spcPct val="0"/>
-              </a:spcBef>
-              <a:buNone/>
-              <a:defRPr sz="4400" kern="1200">
+          <a:noFill/>
+          <a:ln w="9525">
+            <a:noFill/>
+            <a:bevel/>
+          </a:ln>
+        </p:spPr>
+        <p:txBody>
+          <a:bodyPr anchor="ctr"/>
+          <a:lstStyle/>
+          <a:p>
+            <a:pPr eaLnBrk="1" hangingPunct="1">
+              <a:defRPr/>
+            </a:pPr>
+            <a:r>
+              <a:rPr lang="en-US" altLang="zh-CN" sz="1400" b="1" dirty="0">
                 <a:solidFill>
-                  <a:schemeClr val="tx1"/>
+                  <a:srgbClr val="0096B4"/>
                 </a:solidFill>
-                <a:latin typeface="+mj-lt"/>
-                <a:ea typeface="+mj-ea"/>
-                <a:cs typeface="+mj-cs"/>
-              </a:defRPr>
-            </a:lvl1pPr>
-          </a:lstStyle>
-          <a:p>
-            <a:r>
-              <a:rPr lang="zh-CN" altLang="en-US" sz="4000" b="1" dirty="0">
-                <a:latin typeface="+mn-ea"/>
-                <a:ea typeface="+mn-ea"/>
+                <a:latin typeface="Arial" panose="020B0604020202020204" pitchFamily="34" charset="0"/>
+                <a:cs typeface="Arial" panose="020B0604020202020204" pitchFamily="34" charset="0"/>
               </a:rPr>
-              <a:t>主要设计难点</a:t>
-            </a:r>
-          </a:p>
-        </p:txBody>
-      </p:sp>
-      <p:pic>
-        <p:nvPicPr>
-          <p:cNvPr id="2" name="图片 1" descr="徽标&#10;&#10;AI 生成的内容可能不正确。">
-            <a:extLst>
-              <a:ext uri="{FF2B5EF4-FFF2-40B4-BE49-F238E27FC236}">
-                <a16:creationId xmlns:a16="http://schemas.microsoft.com/office/drawing/2014/main" id="{8A69AECE-4034-0ECF-5BAE-6438F6D28555}"/>
-              </a:ext>
-            </a:extLst>
-          </p:cNvPr>
-          <p:cNvPicPr>
-            <a:picLocks/>
-          </p:cNvPicPr>
+              <a:t>Prepared by AIR-Tech@ </a:t>
+            </a:r>
+            <a:fld id="{5853BA87-C0A4-4D40-A7D0-264FBDFF6174}" type="datetime9">
+              <a:rPr lang="en-US" altLang="zh-CN" sz="1400" b="1" dirty="0" smtClean="0">
+                <a:solidFill>
+                  <a:srgbClr val="0096B4"/>
+                </a:solidFill>
+                <a:latin typeface="Arial" panose="020B0604020202020204" pitchFamily="34" charset="0"/>
+                <a:cs typeface="Arial" panose="020B0604020202020204" pitchFamily="34" charset="0"/>
+              </a:rPr>
+              <a:t>7/6/2026 6:22:11 PM</a:t>
+            </a:fld>
+            <a:endParaRPr lang="zh-CN" altLang="en-US" sz="1400" b="1" dirty="0">
+              <a:solidFill>
+                <a:srgbClr val="0096B4"/>
+              </a:solidFill>
+              <a:latin typeface="Arial" panose="020B0604020202020204" pitchFamily="34" charset="0"/>
+              <a:cs typeface="Arial" panose="020B0604020202020204" pitchFamily="34" charset="0"/>
+            </a:endParaRPr>
+          </a:p>
+        </p:txBody>
+      </p:sp>
+      <p:sp>
+        <p:nvSpPr>
+          <p:cNvPr id="4" name="文本框 3">
+            <a:extLst>
+              <a:ext uri="{FF2B5EF4-FFF2-40B4-BE49-F238E27FC236}">
+                <a16:creationId xmlns:a16="http://schemas.microsoft.com/office/drawing/2014/main" id="{DAC67AC4-919A-C2E0-F471-E99DB7D5C825}"/>
+              </a:ext>
+            </a:extLst>
+          </p:cNvPr>
+          <p:cNvSpPr txBox="1"/>
           <p:nvPr/>
-        </p:nvPicPr>
-        <p:blipFill>
-          <a:blip r:embed="rId2">
-            <a:extLst>
-              <a:ext uri="{28A0092B-C50C-407E-A947-70E740481C1C}">
-                <a14:useLocalDpi xmlns:a14="http://schemas.microsoft.com/office/drawing/2010/main" val="0"/>
-              </a:ext>
-            </a:extLst>
-          </a:blip>
-          <a:srcRect t="29985" b="27316"/>
-          <a:stretch>
-            <a:fillRect/>
-          </a:stretch>
-        </p:blipFill>
-        <p:spPr>
-          <a:xfrm>
-            <a:off x="184195" y="166221"/>
-            <a:ext cx="1741461" cy="688543"/>
+        </p:nvSpPr>
+        <p:spPr>
+          <a:xfrm>
+            <a:off x="3045093" y="2249386"/>
+            <a:ext cx="6094902" cy="1015663"/>
           </a:xfrm>
           <a:prstGeom prst="rect">
             <a:avLst/>
           </a:prstGeom>
-        </p:spPr>
-      </p:pic>
+          <a:noFill/>
+        </p:spPr>
+        <p:txBody>
+          <a:bodyPr wrap="square">
+            <a:spAutoFit/>
+          </a:bodyPr>
+          <a:lstStyle/>
+          <a:p>
+            <a:pPr algn="ctr"/>
+            <a:r>
+              <a:rPr lang="zh-CN" altLang="en-US" sz="6000" b="1" dirty="0"/>
+              <a:t>接下来的规划</a:t>
+            </a:r>
+          </a:p>
+        </p:txBody>
+      </p:sp>
     </p:spTree>
     <p:extLst>
       <p:ext uri="{BB962C8B-B14F-4D97-AF65-F5344CB8AC3E}">
-        <p14:creationId xmlns:p14="http://schemas.microsoft.com/office/powerpoint/2010/main" val="2300556188"/>
+        <p14:creationId xmlns:p14="http://schemas.microsoft.com/office/powerpoint/2010/main" val="2995445147"/>
       </p:ext>
     </p:extLst>
   </p:cSld>
@@ -5581,7 +5371,7 @@
         <p:cNvPr id="1" name="">
           <a:extLst>
             <a:ext uri="{FF2B5EF4-FFF2-40B4-BE49-F238E27FC236}">
-              <a16:creationId xmlns:a16="http://schemas.microsoft.com/office/drawing/2014/main" id="{5664D61C-98BC-1000-D73F-057D499198A6}"/>
+              <a16:creationId xmlns:a16="http://schemas.microsoft.com/office/drawing/2014/main" id="{3083B666-6CF1-A393-0663-AD1A9AC885CD}"/>
             </a:ext>
           </a:extLst>
         </p:cNvPr>
@@ -5601,7 +5391,7 @@
           <p:cNvPr id="4" name="矩形 3">
             <a:extLst>
               <a:ext uri="{FF2B5EF4-FFF2-40B4-BE49-F238E27FC236}">
-                <a16:creationId xmlns:a16="http://schemas.microsoft.com/office/drawing/2014/main" id="{3B0E8B1B-EAA7-F736-1500-1CA149A1E8DD}"/>
+                <a16:creationId xmlns:a16="http://schemas.microsoft.com/office/drawing/2014/main" id="{8E621D31-4CB9-B274-8807-DA2D65816D1C}"/>
               </a:ext>
             </a:extLst>
           </p:cNvPr>
@@ -5653,7 +5443,7 @@
           <p:cNvPr id="6" name="矩形 5">
             <a:extLst>
               <a:ext uri="{FF2B5EF4-FFF2-40B4-BE49-F238E27FC236}">
-                <a16:creationId xmlns:a16="http://schemas.microsoft.com/office/drawing/2014/main" id="{C08E07A2-384C-ACA1-2AA8-0EFE0C555FBF}"/>
+                <a16:creationId xmlns:a16="http://schemas.microsoft.com/office/drawing/2014/main" id="{95533B91-FB62-3FF3-6962-B25DAA8A4A9F}"/>
               </a:ext>
             </a:extLst>
           </p:cNvPr>
@@ -5705,7 +5495,7 @@
           <p:cNvPr id="7" name="标题 1">
             <a:extLst>
               <a:ext uri="{FF2B5EF4-FFF2-40B4-BE49-F238E27FC236}">
-                <a16:creationId xmlns:a16="http://schemas.microsoft.com/office/drawing/2014/main" id="{20C251A3-3BA2-59F8-0319-81AA282CB128}"/>
+                <a16:creationId xmlns:a16="http://schemas.microsoft.com/office/drawing/2014/main" id="{BDF3B1CF-7975-4412-98F0-32FF72F44D38}"/>
               </a:ext>
             </a:extLst>
           </p:cNvPr>
@@ -5752,52 +5542,15 @@
                 <a:latin typeface="+mn-ea"/>
                 <a:ea typeface="+mn-ea"/>
               </a:rPr>
-              <a:t>主要设计难点</a:t>
-            </a:r>
-          </a:p>
-        </p:txBody>
-      </p:sp>
-      <p:pic>
-        <p:nvPicPr>
-          <p:cNvPr id="2" name="图片 1" descr="徽标&#10;&#10;AI 生成的内容可能不正确。">
-            <a:extLst>
-              <a:ext uri="{FF2B5EF4-FFF2-40B4-BE49-F238E27FC236}">
-                <a16:creationId xmlns:a16="http://schemas.microsoft.com/office/drawing/2014/main" id="{0E2EF0C2-B482-72A2-E97F-8759F4886884}"/>
-              </a:ext>
-            </a:extLst>
-          </p:cNvPr>
-          <p:cNvPicPr>
-            <a:picLocks/>
-          </p:cNvPicPr>
-          <p:nvPr/>
-        </p:nvPicPr>
-        <p:blipFill>
-          <a:blip r:embed="rId2">
-            <a:extLst>
-              <a:ext uri="{28A0092B-C50C-407E-A947-70E740481C1C}">
-                <a14:useLocalDpi xmlns:a14="http://schemas.microsoft.com/office/drawing/2010/main" val="0"/>
-              </a:ext>
-            </a:extLst>
-          </a:blip>
-          <a:srcRect t="29985" b="27316"/>
-          <a:stretch>
-            <a:fillRect/>
-          </a:stretch>
-        </p:blipFill>
-        <p:spPr>
-          <a:xfrm>
-            <a:off x="184195" y="166221"/>
-            <a:ext cx="1741461" cy="688543"/>
-          </a:xfrm>
-          <a:prstGeom prst="rect">
-            <a:avLst/>
-          </a:prstGeom>
-        </p:spPr>
-      </p:pic>
+              <a:t>接下来的规划</a:t>
+            </a:r>
+          </a:p>
+        </p:txBody>
+      </p:sp>
     </p:spTree>
     <p:extLst>
       <p:ext uri="{BB962C8B-B14F-4D97-AF65-F5344CB8AC3E}">
-        <p14:creationId xmlns:p14="http://schemas.microsoft.com/office/powerpoint/2010/main" val="3393810164"/>
+        <p14:creationId xmlns:p14="http://schemas.microsoft.com/office/powerpoint/2010/main" val="782037625"/>
       </p:ext>
     </p:extLst>
   </p:cSld>
@@ -5835,7 +5588,7 @@
         <p:cNvPr id="1" name="">
           <a:extLst>
             <a:ext uri="{FF2B5EF4-FFF2-40B4-BE49-F238E27FC236}">
-              <a16:creationId xmlns:a16="http://schemas.microsoft.com/office/drawing/2014/main" id="{996B166B-DF22-82F8-A374-B42F4283E0D2}"/>
+              <a16:creationId xmlns:a16="http://schemas.microsoft.com/office/drawing/2014/main" id="{ED2B1A5F-3FC7-633D-B33F-CF6F83561894}"/>
             </a:ext>
           </a:extLst>
         </p:cNvPr>
@@ -5852,10 +5605,10 @@
       </p:grpSpPr>
       <p:sp>
         <p:nvSpPr>
-          <p:cNvPr id="9" name="矩形 8">
-            <a:extLst>
-              <a:ext uri="{FF2B5EF4-FFF2-40B4-BE49-F238E27FC236}">
-                <a16:creationId xmlns:a16="http://schemas.microsoft.com/office/drawing/2014/main" id="{AB853696-25E0-648F-25C1-4C1C045C864A}"/>
+          <p:cNvPr id="4" name="矩形 3">
+            <a:extLst>
+              <a:ext uri="{FF2B5EF4-FFF2-40B4-BE49-F238E27FC236}">
+                <a16:creationId xmlns:a16="http://schemas.microsoft.com/office/drawing/2014/main" id="{090CE197-3686-4B01-5C90-04CEC9212F5F}"/>
               </a:ext>
             </a:extLst>
           </p:cNvPr>
@@ -5864,8 +5617,8 @@
         </p:nvSpPr>
         <p:spPr>
           <a:xfrm>
-            <a:off x="0" y="4053249"/>
-            <a:ext cx="12192000" cy="2709193"/>
+            <a:off x="0" y="944628"/>
+            <a:ext cx="2025283" cy="5913372"/>
           </a:xfrm>
           <a:prstGeom prst="rect">
             <a:avLst/>
@@ -5898,20 +5651,16 @@
           <a:lstStyle/>
           <a:p>
             <a:pPr algn="ctr"/>
-            <a:r>
-              <a:rPr lang="en-US" altLang="zh-CN" dirty="0"/>
-              <a:t>·</a:t>
-            </a:r>
-            <a:endParaRPr lang="zh-CN" altLang="en-US" dirty="0"/>
-          </a:p>
-        </p:txBody>
-      </p:sp>
-      <p:sp>
-        <p:nvSpPr>
-          <p:cNvPr id="12" name="矩形 11">
-            <a:extLst>
-              <a:ext uri="{FF2B5EF4-FFF2-40B4-BE49-F238E27FC236}">
-                <a16:creationId xmlns:a16="http://schemas.microsoft.com/office/drawing/2014/main" id="{1A2F2127-8289-3911-873B-B8B458DCDD53}"/>
+            <a:endParaRPr lang="zh-CN" altLang="en-US"/>
+          </a:p>
+        </p:txBody>
+      </p:sp>
+      <p:sp>
+        <p:nvSpPr>
+          <p:cNvPr id="6" name="矩形 5">
+            <a:extLst>
+              <a:ext uri="{FF2B5EF4-FFF2-40B4-BE49-F238E27FC236}">
+                <a16:creationId xmlns:a16="http://schemas.microsoft.com/office/drawing/2014/main" id="{096CA2C9-4BE2-578F-9DDE-F5950D93ED03}"/>
               </a:ext>
             </a:extLst>
           </p:cNvPr>
@@ -5920,8 +5669,8 @@
         </p:nvSpPr>
         <p:spPr>
           <a:xfrm>
-            <a:off x="0" y="4148807"/>
-            <a:ext cx="12192000" cy="2709193"/>
+            <a:off x="-1" y="1080655"/>
+            <a:ext cx="2025283" cy="5777345"/>
           </a:xfrm>
           <a:prstGeom prst="rect">
             <a:avLst/>
@@ -5960,186 +5709,65 @@
       </p:sp>
       <p:sp>
         <p:nvSpPr>
-          <p:cNvPr id="13" name="副标题 2">
-            <a:extLst>
-              <a:ext uri="{FF2B5EF4-FFF2-40B4-BE49-F238E27FC236}">
-                <a16:creationId xmlns:a16="http://schemas.microsoft.com/office/drawing/2014/main" id="{D0674884-996F-82E0-017A-4ECABC69ECB0}"/>
-              </a:ext>
-            </a:extLst>
-          </p:cNvPr>
-          <p:cNvSpPr>
-            <a:spLocks noGrp="1"/>
-          </p:cNvSpPr>
-          <p:nvPr>
-            <p:ph type="subTitle" idx="1"/>
-          </p:nvPr>
-        </p:nvSpPr>
-        <p:spPr>
-          <a:xfrm>
-            <a:off x="8227751" y="4900655"/>
-            <a:ext cx="3517260" cy="1205494"/>
-          </a:xfrm>
-        </p:spPr>
-        <p:txBody>
-          <a:bodyPr>
-            <a:normAutofit/>
-          </a:bodyPr>
-          <a:lstStyle/>
-          <a:p>
-            <a:r>
-              <a:rPr lang="zh-CN" altLang="en-US" sz="3200" b="1" dirty="0">
-                <a:solidFill>
-                  <a:schemeClr val="bg1"/>
-                </a:solidFill>
-                <a:latin typeface="+mn-ea"/>
-              </a:rPr>
-              <a:t>接下来需要做部分未达到的遗憾</a:t>
-            </a:r>
-          </a:p>
-        </p:txBody>
-      </p:sp>
-      <p:sp>
-        <p:nvSpPr>
-          <p:cNvPr id="14" name="Text Placeholder 1">
-            <a:extLst>
-              <a:ext uri="{FF2B5EF4-FFF2-40B4-BE49-F238E27FC236}">
-                <a16:creationId xmlns:a16="http://schemas.microsoft.com/office/drawing/2014/main" id="{5A6E5C74-36FF-DC30-7F88-FEE1AE672704}"/>
-              </a:ext>
-            </a:extLst>
-          </p:cNvPr>
-          <p:cNvSpPr>
-            <a:spLocks noChangeArrowheads="1"/>
+          <p:cNvPr id="7" name="标题 1">
+            <a:extLst>
+              <a:ext uri="{FF2B5EF4-FFF2-40B4-BE49-F238E27FC236}">
+                <a16:creationId xmlns:a16="http://schemas.microsoft.com/office/drawing/2014/main" id="{7BED06A0-CA3B-ADCD-8694-DA8FD461B51E}"/>
+              </a:ext>
+            </a:extLst>
+          </p:cNvPr>
+          <p:cNvSpPr txBox="1">
+            <a:spLocks/>
           </p:cNvSpPr>
           <p:nvPr/>
         </p:nvSpPr>
-        <p:spPr bwMode="auto">
-          <a:xfrm>
-            <a:off x="184195" y="6106149"/>
-            <a:ext cx="5721796" cy="440494"/>
+        <p:spPr>
+          <a:xfrm>
+            <a:off x="2231406" y="197312"/>
+            <a:ext cx="4412506" cy="647777"/>
           </a:xfrm>
           <a:prstGeom prst="rect">
             <a:avLst/>
           </a:prstGeom>
-          <a:noFill/>
-          <a:ln w="9525">
-            <a:noFill/>
-            <a:bevel/>
-          </a:ln>
-        </p:spPr>
-        <p:txBody>
-          <a:bodyPr anchor="ctr"/>
-          <a:lstStyle/>
-          <a:p>
-            <a:pPr eaLnBrk="1" hangingPunct="1">
-              <a:defRPr/>
-            </a:pPr>
-            <a:r>
-              <a:rPr lang="en-US" altLang="zh-CN" sz="1400" b="1" dirty="0">
+        </p:spPr>
+        <p:txBody>
+          <a:bodyPr vert="horz" lIns="91440" tIns="45720" rIns="91440" bIns="45720" rtlCol="0" anchor="ctr">
+            <a:normAutofit/>
+          </a:bodyPr>
+          <a:lstStyle>
+            <a:lvl1pPr algn="l" defTabSz="914400" rtl="0" eaLnBrk="1" latinLnBrk="0" hangingPunct="1">
+              <a:lnSpc>
+                <a:spcPct val="90000"/>
+              </a:lnSpc>
+              <a:spcBef>
+                <a:spcPct val="0"/>
+              </a:spcBef>
+              <a:buNone/>
+              <a:defRPr sz="4400" kern="1200">
                 <a:solidFill>
-                  <a:srgbClr val="0096B4"/>
+                  <a:schemeClr val="tx1"/>
                 </a:solidFill>
-                <a:latin typeface="Arial" panose="020B0604020202020204" pitchFamily="34" charset="0"/>
-                <a:cs typeface="Arial" panose="020B0604020202020204" pitchFamily="34" charset="0"/>
+                <a:latin typeface="+mj-lt"/>
+                <a:ea typeface="+mj-ea"/>
+                <a:cs typeface="+mj-cs"/>
+              </a:defRPr>
+            </a:lvl1pPr>
+          </a:lstStyle>
+          <a:p>
+            <a:r>
+              <a:rPr lang="zh-CN" altLang="en-US" sz="4000" b="1" dirty="0">
+                <a:latin typeface="+mn-ea"/>
+                <a:ea typeface="+mn-ea"/>
               </a:rPr>
-              <a:t>Prepared by AIR-Tech@ </a:t>
-            </a:r>
-            <a:fld id="{5853BA87-C0A4-4D40-A7D0-264FBDFF6174}" type="datetime9">
-              <a:rPr lang="en-US" altLang="zh-CN" sz="1400" b="1" dirty="0" smtClean="0">
-                <a:solidFill>
-                  <a:srgbClr val="0096B4"/>
-                </a:solidFill>
-                <a:latin typeface="Arial" panose="020B0604020202020204" pitchFamily="34" charset="0"/>
-                <a:cs typeface="Arial" panose="020B0604020202020204" pitchFamily="34" charset="0"/>
-              </a:rPr>
-              <a:t>11/14/2025 10:59:11 AM</a:t>
-            </a:fld>
-            <a:endParaRPr lang="zh-CN" altLang="en-US" sz="1400" b="1" dirty="0">
-              <a:solidFill>
-                <a:srgbClr val="0096B4"/>
-              </a:solidFill>
-              <a:latin typeface="Arial" panose="020B0604020202020204" pitchFamily="34" charset="0"/>
-              <a:cs typeface="Arial" panose="020B0604020202020204" pitchFamily="34" charset="0"/>
-            </a:endParaRPr>
-          </a:p>
-        </p:txBody>
-      </p:sp>
-      <p:sp>
-        <p:nvSpPr>
-          <p:cNvPr id="4" name="文本框 3">
-            <a:extLst>
-              <a:ext uri="{FF2B5EF4-FFF2-40B4-BE49-F238E27FC236}">
-                <a16:creationId xmlns:a16="http://schemas.microsoft.com/office/drawing/2014/main" id="{DAC67AC4-919A-C2E0-F471-E99DB7D5C825}"/>
-              </a:ext>
-            </a:extLst>
-          </p:cNvPr>
-          <p:cNvSpPr txBox="1"/>
-          <p:nvPr/>
-        </p:nvSpPr>
-        <p:spPr>
-          <a:xfrm>
-            <a:off x="3045093" y="2249386"/>
-            <a:ext cx="6094902" cy="1015663"/>
-          </a:xfrm>
-          <a:prstGeom prst="rect">
-            <a:avLst/>
-          </a:prstGeom>
-          <a:noFill/>
-        </p:spPr>
-        <p:txBody>
-          <a:bodyPr wrap="square">
-            <a:spAutoFit/>
-          </a:bodyPr>
-          <a:lstStyle/>
-          <a:p>
-            <a:pPr algn="ctr"/>
-            <a:r>
-              <a:rPr lang="zh-CN" altLang="en-US" sz="6000" b="1" dirty="0"/>
               <a:t>接下来的规划</a:t>
             </a:r>
           </a:p>
         </p:txBody>
       </p:sp>
-      <p:pic>
-        <p:nvPicPr>
-          <p:cNvPr id="2" name="图片 1" descr="徽标&#10;&#10;AI 生成的内容可能不正确。">
-            <a:extLst>
-              <a:ext uri="{FF2B5EF4-FFF2-40B4-BE49-F238E27FC236}">
-                <a16:creationId xmlns:a16="http://schemas.microsoft.com/office/drawing/2014/main" id="{D479C517-B26F-2B51-F795-C70E5193054B}"/>
-              </a:ext>
-            </a:extLst>
-          </p:cNvPr>
-          <p:cNvPicPr>
-            <a:picLocks/>
-          </p:cNvPicPr>
-          <p:nvPr/>
-        </p:nvPicPr>
-        <p:blipFill>
-          <a:blip r:embed="rId2">
-            <a:extLst>
-              <a:ext uri="{28A0092B-C50C-407E-A947-70E740481C1C}">
-                <a14:useLocalDpi xmlns:a14="http://schemas.microsoft.com/office/drawing/2010/main" val="0"/>
-              </a:ext>
-            </a:extLst>
-          </a:blip>
-          <a:srcRect t="29985" b="27316"/>
-          <a:stretch>
-            <a:fillRect/>
-          </a:stretch>
-        </p:blipFill>
-        <p:spPr>
-          <a:xfrm>
-            <a:off x="184195" y="166221"/>
-            <a:ext cx="1741461" cy="688543"/>
-          </a:xfrm>
-          <a:prstGeom prst="rect">
-            <a:avLst/>
-          </a:prstGeom>
-        </p:spPr>
-      </p:pic>
     </p:spTree>
     <p:extLst>
       <p:ext uri="{BB962C8B-B14F-4D97-AF65-F5344CB8AC3E}">
-        <p14:creationId xmlns:p14="http://schemas.microsoft.com/office/powerpoint/2010/main" val="2995445147"/>
+        <p14:creationId xmlns:p14="http://schemas.microsoft.com/office/powerpoint/2010/main" val="1975532276"/>
       </p:ext>
     </p:extLst>
   </p:cSld>
@@ -6177,7 +5805,7 @@
         <p:cNvPr id="1" name="">
           <a:extLst>
             <a:ext uri="{FF2B5EF4-FFF2-40B4-BE49-F238E27FC236}">
-              <a16:creationId xmlns:a16="http://schemas.microsoft.com/office/drawing/2014/main" id="{3083B666-6CF1-A393-0663-AD1A9AC885CD}"/>
+              <a16:creationId xmlns:a16="http://schemas.microsoft.com/office/drawing/2014/main" id="{3E64057B-4949-9E0C-F8BF-AAA443B3FF01}"/>
             </a:ext>
           </a:extLst>
         </p:cNvPr>
@@ -6197,7 +5825,7 @@
           <p:cNvPr id="4" name="矩形 3">
             <a:extLst>
               <a:ext uri="{FF2B5EF4-FFF2-40B4-BE49-F238E27FC236}">
-                <a16:creationId xmlns:a16="http://schemas.microsoft.com/office/drawing/2014/main" id="{8E621D31-4CB9-B274-8807-DA2D65816D1C}"/>
+                <a16:creationId xmlns:a16="http://schemas.microsoft.com/office/drawing/2014/main" id="{F982514C-FE75-458B-0E8C-FA5BD22DD885}"/>
               </a:ext>
             </a:extLst>
           </p:cNvPr>
@@ -6249,7 +5877,7 @@
           <p:cNvPr id="6" name="矩形 5">
             <a:extLst>
               <a:ext uri="{FF2B5EF4-FFF2-40B4-BE49-F238E27FC236}">
-                <a16:creationId xmlns:a16="http://schemas.microsoft.com/office/drawing/2014/main" id="{95533B91-FB62-3FF3-6962-B25DAA8A4A9F}"/>
+                <a16:creationId xmlns:a16="http://schemas.microsoft.com/office/drawing/2014/main" id="{BA3999D6-8ECA-0A7E-5CBB-EC754869089B}"/>
               </a:ext>
             </a:extLst>
           </p:cNvPr>
@@ -6301,7 +5929,7 @@
           <p:cNvPr id="7" name="标题 1">
             <a:extLst>
               <a:ext uri="{FF2B5EF4-FFF2-40B4-BE49-F238E27FC236}">
-                <a16:creationId xmlns:a16="http://schemas.microsoft.com/office/drawing/2014/main" id="{BDF3B1CF-7975-4412-98F0-32FF72F44D38}"/>
+                <a16:creationId xmlns:a16="http://schemas.microsoft.com/office/drawing/2014/main" id="{EA80CDD0-CBF4-00D2-6768-4E8332415377}"/>
               </a:ext>
             </a:extLst>
           </p:cNvPr>
@@ -6353,47 +5981,10 @@
           </a:p>
         </p:txBody>
       </p:sp>
-      <p:pic>
-        <p:nvPicPr>
-          <p:cNvPr id="2" name="图片 1" descr="徽标&#10;&#10;AI 生成的内容可能不正确。">
-            <a:extLst>
-              <a:ext uri="{FF2B5EF4-FFF2-40B4-BE49-F238E27FC236}">
-                <a16:creationId xmlns:a16="http://schemas.microsoft.com/office/drawing/2014/main" id="{2F1D7FFF-1DBB-093E-4127-CA20C94203E3}"/>
-              </a:ext>
-            </a:extLst>
-          </p:cNvPr>
-          <p:cNvPicPr>
-            <a:picLocks/>
-          </p:cNvPicPr>
-          <p:nvPr/>
-        </p:nvPicPr>
-        <p:blipFill>
-          <a:blip r:embed="rId2">
-            <a:extLst>
-              <a:ext uri="{28A0092B-C50C-407E-A947-70E740481C1C}">
-                <a14:useLocalDpi xmlns:a14="http://schemas.microsoft.com/office/drawing/2010/main" val="0"/>
-              </a:ext>
-            </a:extLst>
-          </a:blip>
-          <a:srcRect t="29985" b="27316"/>
-          <a:stretch>
-            <a:fillRect/>
-          </a:stretch>
-        </p:blipFill>
-        <p:spPr>
-          <a:xfrm>
-            <a:off x="184195" y="166221"/>
-            <a:ext cx="1741461" cy="688543"/>
-          </a:xfrm>
-          <a:prstGeom prst="rect">
-            <a:avLst/>
-          </a:prstGeom>
-        </p:spPr>
-      </p:pic>
     </p:spTree>
     <p:extLst>
       <p:ext uri="{BB962C8B-B14F-4D97-AF65-F5344CB8AC3E}">
-        <p14:creationId xmlns:p14="http://schemas.microsoft.com/office/powerpoint/2010/main" val="782037625"/>
+        <p14:creationId xmlns:p14="http://schemas.microsoft.com/office/powerpoint/2010/main" val="1211966660"/>
       </p:ext>
     </p:extLst>
   </p:cSld>
@@ -7063,43 +6654,6 @@
           </a:p>
         </p:txBody>
       </p:sp>
-      <p:pic>
-        <p:nvPicPr>
-          <p:cNvPr id="5" name="图片 4" descr="徽标&#10;&#10;AI 生成的内容可能不正确。">
-            <a:extLst>
-              <a:ext uri="{FF2B5EF4-FFF2-40B4-BE49-F238E27FC236}">
-                <a16:creationId xmlns:a16="http://schemas.microsoft.com/office/drawing/2014/main" id="{23FDCDAC-9819-1467-236D-5C581296920A}"/>
-              </a:ext>
-            </a:extLst>
-          </p:cNvPr>
-          <p:cNvPicPr>
-            <a:picLocks/>
-          </p:cNvPicPr>
-          <p:nvPr/>
-        </p:nvPicPr>
-        <p:blipFill>
-          <a:blip r:embed="rId2">
-            <a:extLst>
-              <a:ext uri="{28A0092B-C50C-407E-A947-70E740481C1C}">
-                <a14:useLocalDpi xmlns:a14="http://schemas.microsoft.com/office/drawing/2010/main" val="0"/>
-              </a:ext>
-            </a:extLst>
-          </a:blip>
-          <a:srcRect t="29985" b="27316"/>
-          <a:stretch>
-            <a:fillRect/>
-          </a:stretch>
-        </p:blipFill>
-        <p:spPr>
-          <a:xfrm>
-            <a:off x="184195" y="166221"/>
-            <a:ext cx="1741461" cy="688543"/>
-          </a:xfrm>
-          <a:prstGeom prst="rect">
-            <a:avLst/>
-          </a:prstGeom>
-        </p:spPr>
-      </p:pic>
     </p:spTree>
     <p:extLst>
       <p:ext uri="{BB962C8B-B14F-4D97-AF65-F5344CB8AC3E}">
@@ -7129,7 +6683,7 @@
         <p:cNvPr id="1" name="">
           <a:extLst>
             <a:ext uri="{FF2B5EF4-FFF2-40B4-BE49-F238E27FC236}">
-              <a16:creationId xmlns:a16="http://schemas.microsoft.com/office/drawing/2014/main" id="{ED2B1A5F-3FC7-633D-B33F-CF6F83561894}"/>
+              <a16:creationId xmlns:a16="http://schemas.microsoft.com/office/drawing/2014/main" id="{223B01EE-E148-643D-97C7-397A549AD695}"/>
             </a:ext>
           </a:extLst>
         </p:cNvPr>
@@ -7149,7 +6703,7 @@
           <p:cNvPr id="4" name="矩形 3">
             <a:extLst>
               <a:ext uri="{FF2B5EF4-FFF2-40B4-BE49-F238E27FC236}">
-                <a16:creationId xmlns:a16="http://schemas.microsoft.com/office/drawing/2014/main" id="{090CE197-3686-4B01-5C90-04CEC9212F5F}"/>
+                <a16:creationId xmlns:a16="http://schemas.microsoft.com/office/drawing/2014/main" id="{DA2B449D-C3F2-3DAF-525A-14F8CBC5027A}"/>
               </a:ext>
             </a:extLst>
           </p:cNvPr>
@@ -7201,7 +6755,7 @@
           <p:cNvPr id="6" name="矩形 5">
             <a:extLst>
               <a:ext uri="{FF2B5EF4-FFF2-40B4-BE49-F238E27FC236}">
-                <a16:creationId xmlns:a16="http://schemas.microsoft.com/office/drawing/2014/main" id="{096CA2C9-4BE2-578F-9DDE-F5950D93ED03}"/>
+                <a16:creationId xmlns:a16="http://schemas.microsoft.com/office/drawing/2014/main" id="{0C72CE05-CF5B-D4CB-4665-EB78128FABBF}"/>
               </a:ext>
             </a:extLst>
           </p:cNvPr>
@@ -7253,7 +6807,7 @@
           <p:cNvPr id="7" name="标题 1">
             <a:extLst>
               <a:ext uri="{FF2B5EF4-FFF2-40B4-BE49-F238E27FC236}">
-                <a16:creationId xmlns:a16="http://schemas.microsoft.com/office/drawing/2014/main" id="{7BED06A0-CA3B-ADCD-8694-DA8FD461B51E}"/>
+                <a16:creationId xmlns:a16="http://schemas.microsoft.com/office/drawing/2014/main" id="{329C5D16-56F4-F83B-85B4-C6596A765F2C}"/>
               </a:ext>
             </a:extLst>
           </p:cNvPr>
@@ -7305,47 +6859,10 @@
           </a:p>
         </p:txBody>
       </p:sp>
-      <p:pic>
-        <p:nvPicPr>
-          <p:cNvPr id="2" name="图片 1" descr="徽标&#10;&#10;AI 生成的内容可能不正确。">
-            <a:extLst>
-              <a:ext uri="{FF2B5EF4-FFF2-40B4-BE49-F238E27FC236}">
-                <a16:creationId xmlns:a16="http://schemas.microsoft.com/office/drawing/2014/main" id="{2121F946-A03C-5F56-A4C7-A01BD4814C86}"/>
-              </a:ext>
-            </a:extLst>
-          </p:cNvPr>
-          <p:cNvPicPr>
-            <a:picLocks/>
-          </p:cNvPicPr>
-          <p:nvPr/>
-        </p:nvPicPr>
-        <p:blipFill>
-          <a:blip r:embed="rId2">
-            <a:extLst>
-              <a:ext uri="{28A0092B-C50C-407E-A947-70E740481C1C}">
-                <a14:useLocalDpi xmlns:a14="http://schemas.microsoft.com/office/drawing/2010/main" val="0"/>
-              </a:ext>
-            </a:extLst>
-          </a:blip>
-          <a:srcRect t="29985" b="27316"/>
-          <a:stretch>
-            <a:fillRect/>
-          </a:stretch>
-        </p:blipFill>
-        <p:spPr>
-          <a:xfrm>
-            <a:off x="184195" y="166221"/>
-            <a:ext cx="1741461" cy="688543"/>
-          </a:xfrm>
-          <a:prstGeom prst="rect">
-            <a:avLst/>
-          </a:prstGeom>
-        </p:spPr>
-      </p:pic>
     </p:spTree>
     <p:extLst>
       <p:ext uri="{BB962C8B-B14F-4D97-AF65-F5344CB8AC3E}">
-        <p14:creationId xmlns:p14="http://schemas.microsoft.com/office/powerpoint/2010/main" val="1975532276"/>
+        <p14:creationId xmlns:p14="http://schemas.microsoft.com/office/powerpoint/2010/main" val="2176991520"/>
       </p:ext>
     </p:extLst>
   </p:cSld>
@@ -7383,7 +6900,7 @@
         <p:cNvPr id="1" name="">
           <a:extLst>
             <a:ext uri="{FF2B5EF4-FFF2-40B4-BE49-F238E27FC236}">
-              <a16:creationId xmlns:a16="http://schemas.microsoft.com/office/drawing/2014/main" id="{3E64057B-4949-9E0C-F8BF-AAA443B3FF01}"/>
+              <a16:creationId xmlns:a16="http://schemas.microsoft.com/office/drawing/2014/main" id="{CDEFE05B-7645-F94F-C588-20C92F4E643A}"/>
             </a:ext>
           </a:extLst>
         </p:cNvPr>
@@ -7400,10 +6917,10 @@
       </p:grpSpPr>
       <p:sp>
         <p:nvSpPr>
-          <p:cNvPr id="4" name="矩形 3">
-            <a:extLst>
-              <a:ext uri="{FF2B5EF4-FFF2-40B4-BE49-F238E27FC236}">
-                <a16:creationId xmlns:a16="http://schemas.microsoft.com/office/drawing/2014/main" id="{F982514C-FE75-458B-0E8C-FA5BD22DD885}"/>
+          <p:cNvPr id="9" name="矩形 8">
+            <a:extLst>
+              <a:ext uri="{FF2B5EF4-FFF2-40B4-BE49-F238E27FC236}">
+                <a16:creationId xmlns:a16="http://schemas.microsoft.com/office/drawing/2014/main" id="{BF484ED5-7D05-E6FB-7077-019C0E601A5D}"/>
               </a:ext>
             </a:extLst>
           </p:cNvPr>
@@ -7412,8 +6929,8 @@
         </p:nvSpPr>
         <p:spPr>
           <a:xfrm>
-            <a:off x="0" y="944628"/>
-            <a:ext cx="2025283" cy="5913372"/>
+            <a:off x="0" y="4053249"/>
+            <a:ext cx="12192000" cy="2709193"/>
           </a:xfrm>
           <a:prstGeom prst="rect">
             <a:avLst/>
@@ -7446,16 +6963,20 @@
           <a:lstStyle/>
           <a:p>
             <a:pPr algn="ctr"/>
-            <a:endParaRPr lang="zh-CN" altLang="en-US"/>
-          </a:p>
-        </p:txBody>
-      </p:sp>
-      <p:sp>
-        <p:nvSpPr>
-          <p:cNvPr id="6" name="矩形 5">
-            <a:extLst>
-              <a:ext uri="{FF2B5EF4-FFF2-40B4-BE49-F238E27FC236}">
-                <a16:creationId xmlns:a16="http://schemas.microsoft.com/office/drawing/2014/main" id="{BA3999D6-8ECA-0A7E-5CBB-EC754869089B}"/>
+            <a:r>
+              <a:rPr lang="en-US" altLang="zh-CN" dirty="0"/>
+              <a:t>·</a:t>
+            </a:r>
+            <a:endParaRPr lang="zh-CN" altLang="en-US" dirty="0"/>
+          </a:p>
+        </p:txBody>
+      </p:sp>
+      <p:sp>
+        <p:nvSpPr>
+          <p:cNvPr id="12" name="矩形 11">
+            <a:extLst>
+              <a:ext uri="{FF2B5EF4-FFF2-40B4-BE49-F238E27FC236}">
+                <a16:creationId xmlns:a16="http://schemas.microsoft.com/office/drawing/2014/main" id="{91729F9D-AE1B-2A1B-F0C9-5D7752704456}"/>
               </a:ext>
             </a:extLst>
           </p:cNvPr>
@@ -7464,8 +6985,8 @@
         </p:nvSpPr>
         <p:spPr>
           <a:xfrm>
-            <a:off x="-1" y="1080655"/>
-            <a:ext cx="2025283" cy="5777345"/>
+            <a:off x="0" y="4148805"/>
+            <a:ext cx="12192000" cy="2709193"/>
           </a:xfrm>
           <a:prstGeom prst="rect">
             <a:avLst/>
@@ -7504,102 +7025,109 @@
       </p:sp>
       <p:sp>
         <p:nvSpPr>
-          <p:cNvPr id="7" name="标题 1">
-            <a:extLst>
-              <a:ext uri="{FF2B5EF4-FFF2-40B4-BE49-F238E27FC236}">
-                <a16:creationId xmlns:a16="http://schemas.microsoft.com/office/drawing/2014/main" id="{EA80CDD0-CBF4-00D2-6768-4E8332415377}"/>
-              </a:ext>
-            </a:extLst>
-          </p:cNvPr>
-          <p:cNvSpPr txBox="1">
-            <a:spLocks/>
+          <p:cNvPr id="14" name="Text Placeholder 1">
+            <a:extLst>
+              <a:ext uri="{FF2B5EF4-FFF2-40B4-BE49-F238E27FC236}">
+                <a16:creationId xmlns:a16="http://schemas.microsoft.com/office/drawing/2014/main" id="{41521101-0052-C9AE-2B42-EE4744E6012B}"/>
+              </a:ext>
+            </a:extLst>
+          </p:cNvPr>
+          <p:cNvSpPr>
+            <a:spLocks noChangeArrowheads="1"/>
           </p:cNvSpPr>
           <p:nvPr/>
         </p:nvSpPr>
-        <p:spPr>
-          <a:xfrm>
-            <a:off x="2231406" y="197312"/>
-            <a:ext cx="4412506" cy="647777"/>
+        <p:spPr bwMode="auto">
+          <a:xfrm>
+            <a:off x="184195" y="6106149"/>
+            <a:ext cx="5721796" cy="440494"/>
           </a:xfrm>
           <a:prstGeom prst="rect">
             <a:avLst/>
           </a:prstGeom>
-        </p:spPr>
-        <p:txBody>
-          <a:bodyPr vert="horz" lIns="91440" tIns="45720" rIns="91440" bIns="45720" rtlCol="0" anchor="ctr">
-            <a:normAutofit/>
-          </a:bodyPr>
-          <a:lstStyle>
-            <a:lvl1pPr algn="l" defTabSz="914400" rtl="0" eaLnBrk="1" latinLnBrk="0" hangingPunct="1">
-              <a:lnSpc>
-                <a:spcPct val="90000"/>
-              </a:lnSpc>
-              <a:spcBef>
-                <a:spcPct val="0"/>
-              </a:spcBef>
-              <a:buNone/>
-              <a:defRPr sz="4400" kern="1200">
+          <a:noFill/>
+          <a:ln w="9525">
+            <a:noFill/>
+            <a:bevel/>
+          </a:ln>
+        </p:spPr>
+        <p:txBody>
+          <a:bodyPr anchor="ctr"/>
+          <a:lstStyle/>
+          <a:p>
+            <a:pPr eaLnBrk="1" hangingPunct="1">
+              <a:defRPr/>
+            </a:pPr>
+            <a:r>
+              <a:rPr lang="en-US" altLang="zh-CN" sz="1400" b="1" dirty="0">
                 <a:solidFill>
-                  <a:schemeClr val="tx1"/>
+                  <a:srgbClr val="0096B4"/>
                 </a:solidFill>
-                <a:latin typeface="+mj-lt"/>
-                <a:ea typeface="+mj-ea"/>
-                <a:cs typeface="+mj-cs"/>
-              </a:defRPr>
-            </a:lvl1pPr>
-          </a:lstStyle>
-          <a:p>
-            <a:r>
-              <a:rPr lang="zh-CN" altLang="en-US" sz="4000" b="1" dirty="0">
-                <a:latin typeface="+mn-ea"/>
-                <a:ea typeface="+mn-ea"/>
+                <a:latin typeface="Arial" panose="020B0604020202020204" pitchFamily="34" charset="0"/>
+                <a:cs typeface="Arial" panose="020B0604020202020204" pitchFamily="34" charset="0"/>
               </a:rPr>
-              <a:t>接下来的规划</a:t>
-            </a:r>
-          </a:p>
-        </p:txBody>
-      </p:sp>
-      <p:pic>
-        <p:nvPicPr>
-          <p:cNvPr id="2" name="图片 1" descr="徽标&#10;&#10;AI 生成的内容可能不正确。">
-            <a:extLst>
-              <a:ext uri="{FF2B5EF4-FFF2-40B4-BE49-F238E27FC236}">
-                <a16:creationId xmlns:a16="http://schemas.microsoft.com/office/drawing/2014/main" id="{D5019EFD-ED7A-6836-CBB9-E8E85CEE20DA}"/>
-              </a:ext>
-            </a:extLst>
-          </p:cNvPr>
-          <p:cNvPicPr>
-            <a:picLocks/>
-          </p:cNvPicPr>
+              <a:t>Prepared by AIR-Tech@ </a:t>
+            </a:r>
+            <a:fld id="{5853BA87-C0A4-4D40-A7D0-264FBDFF6174}" type="datetime9">
+              <a:rPr lang="en-US" altLang="zh-CN" sz="1400" b="1" dirty="0" smtClean="0">
+                <a:solidFill>
+                  <a:srgbClr val="0096B4"/>
+                </a:solidFill>
+                <a:latin typeface="Arial" panose="020B0604020202020204" pitchFamily="34" charset="0"/>
+                <a:cs typeface="Arial" panose="020B0604020202020204" pitchFamily="34" charset="0"/>
+              </a:rPr>
+              <a:t>7/6/2026 6:22:11 PM</a:t>
+            </a:fld>
+            <a:endParaRPr lang="zh-CN" altLang="en-US" sz="1400" b="1" dirty="0">
+              <a:solidFill>
+                <a:srgbClr val="0096B4"/>
+              </a:solidFill>
+              <a:latin typeface="Arial" panose="020B0604020202020204" pitchFamily="34" charset="0"/>
+              <a:cs typeface="Arial" panose="020B0604020202020204" pitchFamily="34" charset="0"/>
+            </a:endParaRPr>
+          </a:p>
+        </p:txBody>
+      </p:sp>
+      <p:sp>
+        <p:nvSpPr>
+          <p:cNvPr id="4" name="文本框 3">
+            <a:extLst>
+              <a:ext uri="{FF2B5EF4-FFF2-40B4-BE49-F238E27FC236}">
+                <a16:creationId xmlns:a16="http://schemas.microsoft.com/office/drawing/2014/main" id="{78611506-9CF2-CED6-0673-98E0CC70569D}"/>
+              </a:ext>
+            </a:extLst>
+          </p:cNvPr>
+          <p:cNvSpPr txBox="1"/>
           <p:nvPr/>
-        </p:nvPicPr>
-        <p:blipFill>
-          <a:blip r:embed="rId2">
-            <a:extLst>
-              <a:ext uri="{28A0092B-C50C-407E-A947-70E740481C1C}">
-                <a14:useLocalDpi xmlns:a14="http://schemas.microsoft.com/office/drawing/2010/main" val="0"/>
-              </a:ext>
-            </a:extLst>
-          </a:blip>
-          <a:srcRect t="29985" b="27316"/>
-          <a:stretch>
-            <a:fillRect/>
-          </a:stretch>
-        </p:blipFill>
-        <p:spPr>
-          <a:xfrm>
-            <a:off x="184195" y="166221"/>
-            <a:ext cx="1741461" cy="688543"/>
+        </p:nvSpPr>
+        <p:spPr>
+          <a:xfrm>
+            <a:off x="3045093" y="2249386"/>
+            <a:ext cx="6094902" cy="1015663"/>
           </a:xfrm>
           <a:prstGeom prst="rect">
             <a:avLst/>
           </a:prstGeom>
-        </p:spPr>
-      </p:pic>
+          <a:noFill/>
+        </p:spPr>
+        <p:txBody>
+          <a:bodyPr wrap="square">
+            <a:spAutoFit/>
+          </a:bodyPr>
+          <a:lstStyle/>
+          <a:p>
+            <a:pPr algn="ctr"/>
+            <a:r>
+              <a:rPr lang="zh-CN" altLang="en-US" sz="6000" b="1" dirty="0"/>
+              <a:t>总结与展望</a:t>
+            </a:r>
+          </a:p>
+        </p:txBody>
+      </p:sp>
     </p:spTree>
     <p:extLst>
       <p:ext uri="{BB962C8B-B14F-4D97-AF65-F5344CB8AC3E}">
-        <p14:creationId xmlns:p14="http://schemas.microsoft.com/office/powerpoint/2010/main" val="1211966660"/>
+        <p14:creationId xmlns:p14="http://schemas.microsoft.com/office/powerpoint/2010/main" val="1155721585"/>
       </p:ext>
     </p:extLst>
   </p:cSld>
@@ -7637,7 +7165,7 @@
         <p:cNvPr id="1" name="">
           <a:extLst>
             <a:ext uri="{FF2B5EF4-FFF2-40B4-BE49-F238E27FC236}">
-              <a16:creationId xmlns:a16="http://schemas.microsoft.com/office/drawing/2014/main" id="{223B01EE-E148-643D-97C7-397A549AD695}"/>
+              <a16:creationId xmlns:a16="http://schemas.microsoft.com/office/drawing/2014/main" id="{38EFB84F-8C3A-DF2B-5AB3-1A1838206962}"/>
             </a:ext>
           </a:extLst>
         </p:cNvPr>
@@ -7657,7 +7185,7 @@
           <p:cNvPr id="4" name="矩形 3">
             <a:extLst>
               <a:ext uri="{FF2B5EF4-FFF2-40B4-BE49-F238E27FC236}">
-                <a16:creationId xmlns:a16="http://schemas.microsoft.com/office/drawing/2014/main" id="{DA2B449D-C3F2-3DAF-525A-14F8CBC5027A}"/>
+                <a16:creationId xmlns:a16="http://schemas.microsoft.com/office/drawing/2014/main" id="{3D6BE0FD-4A42-40D8-5892-C79B4FE45942}"/>
               </a:ext>
             </a:extLst>
           </p:cNvPr>
@@ -7709,7 +7237,7 @@
           <p:cNvPr id="6" name="矩形 5">
             <a:extLst>
               <a:ext uri="{FF2B5EF4-FFF2-40B4-BE49-F238E27FC236}">
-                <a16:creationId xmlns:a16="http://schemas.microsoft.com/office/drawing/2014/main" id="{0C72CE05-CF5B-D4CB-4665-EB78128FABBF}"/>
+                <a16:creationId xmlns:a16="http://schemas.microsoft.com/office/drawing/2014/main" id="{4887F5B3-B8AC-FF1E-4F10-527D3E858F0B}"/>
               </a:ext>
             </a:extLst>
           </p:cNvPr>
@@ -7761,7 +7289,7 @@
           <p:cNvPr id="7" name="标题 1">
             <a:extLst>
               <a:ext uri="{FF2B5EF4-FFF2-40B4-BE49-F238E27FC236}">
-                <a16:creationId xmlns:a16="http://schemas.microsoft.com/office/drawing/2014/main" id="{329C5D16-56F4-F83B-85B4-C6596A765F2C}"/>
+                <a16:creationId xmlns:a16="http://schemas.microsoft.com/office/drawing/2014/main" id="{29962419-950E-2F5C-3A2B-CC4EE1AB3A23}"/>
               </a:ext>
             </a:extLst>
           </p:cNvPr>
@@ -7808,604 +7336,11 @@
                 <a:latin typeface="+mn-ea"/>
                 <a:ea typeface="+mn-ea"/>
               </a:rPr>
-              <a:t>接下来的规划</a:t>
-            </a:r>
-          </a:p>
-        </p:txBody>
-      </p:sp>
-      <p:pic>
-        <p:nvPicPr>
-          <p:cNvPr id="2" name="图片 1" descr="徽标&#10;&#10;AI 生成的内容可能不正确。">
-            <a:extLst>
-              <a:ext uri="{FF2B5EF4-FFF2-40B4-BE49-F238E27FC236}">
-                <a16:creationId xmlns:a16="http://schemas.microsoft.com/office/drawing/2014/main" id="{EC19D602-CD34-259A-F331-2BF243A9F7FD}"/>
-              </a:ext>
-            </a:extLst>
-          </p:cNvPr>
-          <p:cNvPicPr>
-            <a:picLocks/>
-          </p:cNvPicPr>
-          <p:nvPr/>
-        </p:nvPicPr>
-        <p:blipFill>
-          <a:blip r:embed="rId2">
-            <a:extLst>
-              <a:ext uri="{28A0092B-C50C-407E-A947-70E740481C1C}">
-                <a14:useLocalDpi xmlns:a14="http://schemas.microsoft.com/office/drawing/2010/main" val="0"/>
-              </a:ext>
-            </a:extLst>
-          </a:blip>
-          <a:srcRect t="29985" b="27316"/>
-          <a:stretch>
-            <a:fillRect/>
-          </a:stretch>
-        </p:blipFill>
-        <p:spPr>
-          <a:xfrm>
-            <a:off x="184195" y="166221"/>
-            <a:ext cx="1741461" cy="688543"/>
-          </a:xfrm>
-          <a:prstGeom prst="rect">
-            <a:avLst/>
-          </a:prstGeom>
-        </p:spPr>
-      </p:pic>
-    </p:spTree>
-    <p:extLst>
-      <p:ext uri="{BB962C8B-B14F-4D97-AF65-F5344CB8AC3E}">
-        <p14:creationId xmlns:p14="http://schemas.microsoft.com/office/powerpoint/2010/main" val="2176991520"/>
-      </p:ext>
-    </p:extLst>
-  </p:cSld>
-  <p:clrMapOvr>
-    <a:masterClrMapping/>
-  </p:clrMapOvr>
-  <mc:AlternateContent xmlns:mc="http://schemas.openxmlformats.org/markup-compatibility/2006" xmlns:p159="http://schemas.microsoft.com/office/powerpoint/2015/09/main">
-    <mc:Choice Requires="p159">
-      <p:transition xmlns:p14="http://schemas.microsoft.com/office/powerpoint/2010/main" spd="slow" p14:dur="2000">
-        <p159:morph option="byObject"/>
-      </p:transition>
-    </mc:Choice>
-    <mc:Fallback xmlns="">
-      <p:transition spd="slow">
-        <p:fade/>
-      </p:transition>
-    </mc:Fallback>
-  </mc:AlternateContent>
-</p:sld>
-</file>
-
-<file path=ppt/slides/slide23.xml><?xml version="1.0" encoding="utf-8"?>
-<p:sld xmlns:a="http://schemas.openxmlformats.org/drawingml/2006/main" xmlns:r="http://schemas.openxmlformats.org/officeDocument/2006/relationships" xmlns:p="http://schemas.openxmlformats.org/presentationml/2006/main">
-  <p:cSld>
-    <p:bg>
-      <p:bgPr>
-        <a:solidFill>
-          <a:srgbClr val="FFFCF7"/>
-        </a:solidFill>
-        <a:effectLst/>
-      </p:bgPr>
-    </p:bg>
-    <p:spTree>
-      <p:nvGrpSpPr>
-        <p:cNvPr id="1" name="">
-          <a:extLst>
-            <a:ext uri="{FF2B5EF4-FFF2-40B4-BE49-F238E27FC236}">
-              <a16:creationId xmlns:a16="http://schemas.microsoft.com/office/drawing/2014/main" id="{CDEFE05B-7645-F94F-C588-20C92F4E643A}"/>
-            </a:ext>
-          </a:extLst>
-        </p:cNvPr>
-        <p:cNvGrpSpPr/>
-        <p:nvPr/>
-      </p:nvGrpSpPr>
-      <p:grpSpPr>
-        <a:xfrm>
-          <a:off x="0" y="0"/>
-          <a:ext cx="0" cy="0"/>
-          <a:chOff x="0" y="0"/>
-          <a:chExt cx="0" cy="0"/>
-        </a:xfrm>
-      </p:grpSpPr>
-      <p:sp>
-        <p:nvSpPr>
-          <p:cNvPr id="9" name="矩形 8">
-            <a:extLst>
-              <a:ext uri="{FF2B5EF4-FFF2-40B4-BE49-F238E27FC236}">
-                <a16:creationId xmlns:a16="http://schemas.microsoft.com/office/drawing/2014/main" id="{BF484ED5-7D05-E6FB-7077-019C0E601A5D}"/>
-              </a:ext>
-            </a:extLst>
-          </p:cNvPr>
-          <p:cNvSpPr/>
-          <p:nvPr/>
-        </p:nvSpPr>
-        <p:spPr>
-          <a:xfrm>
-            <a:off x="0" y="4053249"/>
-            <a:ext cx="12192000" cy="2709193"/>
-          </a:xfrm>
-          <a:prstGeom prst="rect">
-            <a:avLst/>
-          </a:prstGeom>
-          <a:solidFill>
-            <a:srgbClr val="177BF5"/>
-          </a:solidFill>
-          <a:ln>
-            <a:noFill/>
-          </a:ln>
-        </p:spPr>
-        <p:style>
-          <a:lnRef idx="2">
-            <a:schemeClr val="accent1">
-              <a:shade val="15000"/>
-            </a:schemeClr>
-          </a:lnRef>
-          <a:fillRef idx="1">
-            <a:schemeClr val="accent1"/>
-          </a:fillRef>
-          <a:effectRef idx="0">
-            <a:schemeClr val="accent1"/>
-          </a:effectRef>
-          <a:fontRef idx="minor">
-            <a:schemeClr val="lt1"/>
-          </a:fontRef>
-        </p:style>
-        <p:txBody>
-          <a:bodyPr rtlCol="0" anchor="ctr"/>
-          <a:lstStyle/>
-          <a:p>
-            <a:pPr algn="ctr"/>
-            <a:r>
-              <a:rPr lang="en-US" altLang="zh-CN" dirty="0"/>
-              <a:t>·</a:t>
-            </a:r>
-            <a:endParaRPr lang="zh-CN" altLang="en-US" dirty="0"/>
-          </a:p>
-        </p:txBody>
-      </p:sp>
-      <p:sp>
-        <p:nvSpPr>
-          <p:cNvPr id="12" name="矩形 11">
-            <a:extLst>
-              <a:ext uri="{FF2B5EF4-FFF2-40B4-BE49-F238E27FC236}">
-                <a16:creationId xmlns:a16="http://schemas.microsoft.com/office/drawing/2014/main" id="{91729F9D-AE1B-2A1B-F0C9-5D7752704456}"/>
-              </a:ext>
-            </a:extLst>
-          </p:cNvPr>
-          <p:cNvSpPr/>
-          <p:nvPr/>
-        </p:nvSpPr>
-        <p:spPr>
-          <a:xfrm>
-            <a:off x="0" y="4148805"/>
-            <a:ext cx="12192000" cy="2709193"/>
-          </a:xfrm>
-          <a:prstGeom prst="rect">
-            <a:avLst/>
-          </a:prstGeom>
-          <a:solidFill>
-            <a:srgbClr val="0048CE"/>
-          </a:solidFill>
-          <a:ln>
-            <a:noFill/>
-          </a:ln>
-        </p:spPr>
-        <p:style>
-          <a:lnRef idx="2">
-            <a:schemeClr val="accent1">
-              <a:shade val="15000"/>
-            </a:schemeClr>
-          </a:lnRef>
-          <a:fillRef idx="1">
-            <a:schemeClr val="accent1"/>
-          </a:fillRef>
-          <a:effectRef idx="0">
-            <a:schemeClr val="accent1"/>
-          </a:effectRef>
-          <a:fontRef idx="minor">
-            <a:schemeClr val="lt1"/>
-          </a:fontRef>
-        </p:style>
-        <p:txBody>
-          <a:bodyPr rtlCol="0" anchor="ctr"/>
-          <a:lstStyle/>
-          <a:p>
-            <a:pPr algn="ctr"/>
-            <a:endParaRPr lang="zh-CN" altLang="en-US"/>
-          </a:p>
-        </p:txBody>
-      </p:sp>
-      <p:sp>
-        <p:nvSpPr>
-          <p:cNvPr id="14" name="Text Placeholder 1">
-            <a:extLst>
-              <a:ext uri="{FF2B5EF4-FFF2-40B4-BE49-F238E27FC236}">
-                <a16:creationId xmlns:a16="http://schemas.microsoft.com/office/drawing/2014/main" id="{41521101-0052-C9AE-2B42-EE4744E6012B}"/>
-              </a:ext>
-            </a:extLst>
-          </p:cNvPr>
-          <p:cNvSpPr>
-            <a:spLocks noChangeArrowheads="1"/>
-          </p:cNvSpPr>
-          <p:nvPr/>
-        </p:nvSpPr>
-        <p:spPr bwMode="auto">
-          <a:xfrm>
-            <a:off x="184195" y="6106149"/>
-            <a:ext cx="5721796" cy="440494"/>
-          </a:xfrm>
-          <a:prstGeom prst="rect">
-            <a:avLst/>
-          </a:prstGeom>
-          <a:noFill/>
-          <a:ln w="9525">
-            <a:noFill/>
-            <a:bevel/>
-          </a:ln>
-        </p:spPr>
-        <p:txBody>
-          <a:bodyPr anchor="ctr"/>
-          <a:lstStyle/>
-          <a:p>
-            <a:pPr eaLnBrk="1" hangingPunct="1">
-              <a:defRPr/>
-            </a:pPr>
-            <a:r>
-              <a:rPr lang="en-US" altLang="zh-CN" sz="1400" b="1" dirty="0">
-                <a:solidFill>
-                  <a:srgbClr val="0096B4"/>
-                </a:solidFill>
-                <a:latin typeface="Arial" panose="020B0604020202020204" pitchFamily="34" charset="0"/>
-                <a:cs typeface="Arial" panose="020B0604020202020204" pitchFamily="34" charset="0"/>
-              </a:rPr>
-              <a:t>Prepared by AIR-Tech@ </a:t>
-            </a:r>
-            <a:fld id="{5853BA87-C0A4-4D40-A7D0-264FBDFF6174}" type="datetime9">
-              <a:rPr lang="en-US" altLang="zh-CN" sz="1400" b="1" dirty="0" smtClean="0">
-                <a:solidFill>
-                  <a:srgbClr val="0096B4"/>
-                </a:solidFill>
-                <a:latin typeface="Arial" panose="020B0604020202020204" pitchFamily="34" charset="0"/>
-                <a:cs typeface="Arial" panose="020B0604020202020204" pitchFamily="34" charset="0"/>
-              </a:rPr>
-              <a:t>11/14/2025 11:00:18 AM</a:t>
-            </a:fld>
-            <a:endParaRPr lang="zh-CN" altLang="en-US" sz="1400" b="1" dirty="0">
-              <a:solidFill>
-                <a:srgbClr val="0096B4"/>
-              </a:solidFill>
-              <a:latin typeface="Arial" panose="020B0604020202020204" pitchFamily="34" charset="0"/>
-              <a:cs typeface="Arial" panose="020B0604020202020204" pitchFamily="34" charset="0"/>
-            </a:endParaRPr>
-          </a:p>
-        </p:txBody>
-      </p:sp>
-      <p:sp>
-        <p:nvSpPr>
-          <p:cNvPr id="4" name="文本框 3">
-            <a:extLst>
-              <a:ext uri="{FF2B5EF4-FFF2-40B4-BE49-F238E27FC236}">
-                <a16:creationId xmlns:a16="http://schemas.microsoft.com/office/drawing/2014/main" id="{78611506-9CF2-CED6-0673-98E0CC70569D}"/>
-              </a:ext>
-            </a:extLst>
-          </p:cNvPr>
-          <p:cNvSpPr txBox="1"/>
-          <p:nvPr/>
-        </p:nvSpPr>
-        <p:spPr>
-          <a:xfrm>
-            <a:off x="3045093" y="2249386"/>
-            <a:ext cx="6094902" cy="1015663"/>
-          </a:xfrm>
-          <a:prstGeom prst="rect">
-            <a:avLst/>
-          </a:prstGeom>
-          <a:noFill/>
-        </p:spPr>
-        <p:txBody>
-          <a:bodyPr wrap="square">
-            <a:spAutoFit/>
-          </a:bodyPr>
-          <a:lstStyle/>
-          <a:p>
-            <a:pPr algn="ctr"/>
-            <a:r>
-              <a:rPr lang="zh-CN" altLang="en-US" sz="6000" b="1" dirty="0"/>
               <a:t>总结与展望</a:t>
             </a:r>
           </a:p>
         </p:txBody>
       </p:sp>
-      <p:pic>
-        <p:nvPicPr>
-          <p:cNvPr id="2" name="图片 1" descr="徽标&#10;&#10;AI 生成的内容可能不正确。">
-            <a:extLst>
-              <a:ext uri="{FF2B5EF4-FFF2-40B4-BE49-F238E27FC236}">
-                <a16:creationId xmlns:a16="http://schemas.microsoft.com/office/drawing/2014/main" id="{19297531-6A0F-36BF-9120-D184A0E0E289}"/>
-              </a:ext>
-            </a:extLst>
-          </p:cNvPr>
-          <p:cNvPicPr>
-            <a:picLocks/>
-          </p:cNvPicPr>
-          <p:nvPr/>
-        </p:nvPicPr>
-        <p:blipFill>
-          <a:blip r:embed="rId2">
-            <a:extLst>
-              <a:ext uri="{28A0092B-C50C-407E-A947-70E740481C1C}">
-                <a14:useLocalDpi xmlns:a14="http://schemas.microsoft.com/office/drawing/2010/main" val="0"/>
-              </a:ext>
-            </a:extLst>
-          </a:blip>
-          <a:srcRect t="29985" b="27316"/>
-          <a:stretch>
-            <a:fillRect/>
-          </a:stretch>
-        </p:blipFill>
-        <p:spPr>
-          <a:xfrm>
-            <a:off x="184195" y="166221"/>
-            <a:ext cx="1741461" cy="688543"/>
-          </a:xfrm>
-          <a:prstGeom prst="rect">
-            <a:avLst/>
-          </a:prstGeom>
-        </p:spPr>
-      </p:pic>
-    </p:spTree>
-    <p:extLst>
-      <p:ext uri="{BB962C8B-B14F-4D97-AF65-F5344CB8AC3E}">
-        <p14:creationId xmlns:p14="http://schemas.microsoft.com/office/powerpoint/2010/main" val="1155721585"/>
-      </p:ext>
-    </p:extLst>
-  </p:cSld>
-  <p:clrMapOvr>
-    <a:masterClrMapping/>
-  </p:clrMapOvr>
-  <mc:AlternateContent xmlns:mc="http://schemas.openxmlformats.org/markup-compatibility/2006" xmlns:p159="http://schemas.microsoft.com/office/powerpoint/2015/09/main">
-    <mc:Choice Requires="p159">
-      <p:transition xmlns:p14="http://schemas.microsoft.com/office/powerpoint/2010/main" spd="slow" p14:dur="2000">
-        <p159:morph option="byObject"/>
-      </p:transition>
-    </mc:Choice>
-    <mc:Fallback xmlns="">
-      <p:transition spd="slow">
-        <p:fade/>
-      </p:transition>
-    </mc:Fallback>
-  </mc:AlternateContent>
-</p:sld>
-</file>
-
-<file path=ppt/slides/slide24.xml><?xml version="1.0" encoding="utf-8"?>
-<p:sld xmlns:a="http://schemas.openxmlformats.org/drawingml/2006/main" xmlns:r="http://schemas.openxmlformats.org/officeDocument/2006/relationships" xmlns:p="http://schemas.openxmlformats.org/presentationml/2006/main">
-  <p:cSld>
-    <p:bg>
-      <p:bgPr>
-        <a:solidFill>
-          <a:srgbClr val="FFFCF7"/>
-        </a:solidFill>
-        <a:effectLst/>
-      </p:bgPr>
-    </p:bg>
-    <p:spTree>
-      <p:nvGrpSpPr>
-        <p:cNvPr id="1" name="">
-          <a:extLst>
-            <a:ext uri="{FF2B5EF4-FFF2-40B4-BE49-F238E27FC236}">
-              <a16:creationId xmlns:a16="http://schemas.microsoft.com/office/drawing/2014/main" id="{38EFB84F-8C3A-DF2B-5AB3-1A1838206962}"/>
-            </a:ext>
-          </a:extLst>
-        </p:cNvPr>
-        <p:cNvGrpSpPr/>
-        <p:nvPr/>
-      </p:nvGrpSpPr>
-      <p:grpSpPr>
-        <a:xfrm>
-          <a:off x="0" y="0"/>
-          <a:ext cx="0" cy="0"/>
-          <a:chOff x="0" y="0"/>
-          <a:chExt cx="0" cy="0"/>
-        </a:xfrm>
-      </p:grpSpPr>
-      <p:sp>
-        <p:nvSpPr>
-          <p:cNvPr id="4" name="矩形 3">
-            <a:extLst>
-              <a:ext uri="{FF2B5EF4-FFF2-40B4-BE49-F238E27FC236}">
-                <a16:creationId xmlns:a16="http://schemas.microsoft.com/office/drawing/2014/main" id="{3D6BE0FD-4A42-40D8-5892-C79B4FE45942}"/>
-              </a:ext>
-            </a:extLst>
-          </p:cNvPr>
-          <p:cNvSpPr/>
-          <p:nvPr/>
-        </p:nvSpPr>
-        <p:spPr>
-          <a:xfrm>
-            <a:off x="0" y="944628"/>
-            <a:ext cx="2025283" cy="5913372"/>
-          </a:xfrm>
-          <a:prstGeom prst="rect">
-            <a:avLst/>
-          </a:prstGeom>
-          <a:solidFill>
-            <a:srgbClr val="177BF5"/>
-          </a:solidFill>
-          <a:ln>
-            <a:noFill/>
-          </a:ln>
-        </p:spPr>
-        <p:style>
-          <a:lnRef idx="2">
-            <a:schemeClr val="accent1">
-              <a:shade val="15000"/>
-            </a:schemeClr>
-          </a:lnRef>
-          <a:fillRef idx="1">
-            <a:schemeClr val="accent1"/>
-          </a:fillRef>
-          <a:effectRef idx="0">
-            <a:schemeClr val="accent1"/>
-          </a:effectRef>
-          <a:fontRef idx="minor">
-            <a:schemeClr val="lt1"/>
-          </a:fontRef>
-        </p:style>
-        <p:txBody>
-          <a:bodyPr rtlCol="0" anchor="ctr"/>
-          <a:lstStyle/>
-          <a:p>
-            <a:pPr algn="ctr"/>
-            <a:endParaRPr lang="zh-CN" altLang="en-US"/>
-          </a:p>
-        </p:txBody>
-      </p:sp>
-      <p:sp>
-        <p:nvSpPr>
-          <p:cNvPr id="6" name="矩形 5">
-            <a:extLst>
-              <a:ext uri="{FF2B5EF4-FFF2-40B4-BE49-F238E27FC236}">
-                <a16:creationId xmlns:a16="http://schemas.microsoft.com/office/drawing/2014/main" id="{4887F5B3-B8AC-FF1E-4F10-527D3E858F0B}"/>
-              </a:ext>
-            </a:extLst>
-          </p:cNvPr>
-          <p:cNvSpPr/>
-          <p:nvPr/>
-        </p:nvSpPr>
-        <p:spPr>
-          <a:xfrm>
-            <a:off x="-1" y="1080655"/>
-            <a:ext cx="2025283" cy="5777345"/>
-          </a:xfrm>
-          <a:prstGeom prst="rect">
-            <a:avLst/>
-          </a:prstGeom>
-          <a:solidFill>
-            <a:srgbClr val="0048CE"/>
-          </a:solidFill>
-          <a:ln>
-            <a:noFill/>
-          </a:ln>
-        </p:spPr>
-        <p:style>
-          <a:lnRef idx="2">
-            <a:schemeClr val="accent1">
-              <a:shade val="15000"/>
-            </a:schemeClr>
-          </a:lnRef>
-          <a:fillRef idx="1">
-            <a:schemeClr val="accent1"/>
-          </a:fillRef>
-          <a:effectRef idx="0">
-            <a:schemeClr val="accent1"/>
-          </a:effectRef>
-          <a:fontRef idx="minor">
-            <a:schemeClr val="lt1"/>
-          </a:fontRef>
-        </p:style>
-        <p:txBody>
-          <a:bodyPr rtlCol="0" anchor="ctr"/>
-          <a:lstStyle/>
-          <a:p>
-            <a:pPr algn="ctr"/>
-            <a:endParaRPr lang="zh-CN" altLang="en-US"/>
-          </a:p>
-        </p:txBody>
-      </p:sp>
-      <p:sp>
-        <p:nvSpPr>
-          <p:cNvPr id="7" name="标题 1">
-            <a:extLst>
-              <a:ext uri="{FF2B5EF4-FFF2-40B4-BE49-F238E27FC236}">
-                <a16:creationId xmlns:a16="http://schemas.microsoft.com/office/drawing/2014/main" id="{29962419-950E-2F5C-3A2B-CC4EE1AB3A23}"/>
-              </a:ext>
-            </a:extLst>
-          </p:cNvPr>
-          <p:cNvSpPr txBox="1">
-            <a:spLocks/>
-          </p:cNvSpPr>
-          <p:nvPr/>
-        </p:nvSpPr>
-        <p:spPr>
-          <a:xfrm>
-            <a:off x="2231406" y="197312"/>
-            <a:ext cx="4412506" cy="647777"/>
-          </a:xfrm>
-          <a:prstGeom prst="rect">
-            <a:avLst/>
-          </a:prstGeom>
-        </p:spPr>
-        <p:txBody>
-          <a:bodyPr vert="horz" lIns="91440" tIns="45720" rIns="91440" bIns="45720" rtlCol="0" anchor="ctr">
-            <a:normAutofit/>
-          </a:bodyPr>
-          <a:lstStyle>
-            <a:lvl1pPr algn="l" defTabSz="914400" rtl="0" eaLnBrk="1" latinLnBrk="0" hangingPunct="1">
-              <a:lnSpc>
-                <a:spcPct val="90000"/>
-              </a:lnSpc>
-              <a:spcBef>
-                <a:spcPct val="0"/>
-              </a:spcBef>
-              <a:buNone/>
-              <a:defRPr sz="4400" kern="1200">
-                <a:solidFill>
-                  <a:schemeClr val="tx1"/>
-                </a:solidFill>
-                <a:latin typeface="+mj-lt"/>
-                <a:ea typeface="+mj-ea"/>
-                <a:cs typeface="+mj-cs"/>
-              </a:defRPr>
-            </a:lvl1pPr>
-          </a:lstStyle>
-          <a:p>
-            <a:r>
-              <a:rPr lang="zh-CN" altLang="en-US" sz="4000" b="1" dirty="0">
-                <a:latin typeface="+mn-ea"/>
-                <a:ea typeface="+mn-ea"/>
-              </a:rPr>
-              <a:t>总结与展望</a:t>
-            </a:r>
-          </a:p>
-        </p:txBody>
-      </p:sp>
-      <p:pic>
-        <p:nvPicPr>
-          <p:cNvPr id="2" name="图片 1" descr="徽标&#10;&#10;AI 生成的内容可能不正确。">
-            <a:extLst>
-              <a:ext uri="{FF2B5EF4-FFF2-40B4-BE49-F238E27FC236}">
-                <a16:creationId xmlns:a16="http://schemas.microsoft.com/office/drawing/2014/main" id="{FFB78861-4A09-C437-C68A-84D150DD9691}"/>
-              </a:ext>
-            </a:extLst>
-          </p:cNvPr>
-          <p:cNvPicPr>
-            <a:picLocks/>
-          </p:cNvPicPr>
-          <p:nvPr/>
-        </p:nvPicPr>
-        <p:blipFill>
-          <a:blip r:embed="rId2">
-            <a:extLst>
-              <a:ext uri="{28A0092B-C50C-407E-A947-70E740481C1C}">
-                <a14:useLocalDpi xmlns:a14="http://schemas.microsoft.com/office/drawing/2010/main" val="0"/>
-              </a:ext>
-            </a:extLst>
-          </a:blip>
-          <a:srcRect t="29985" b="27316"/>
-          <a:stretch>
-            <a:fillRect/>
-          </a:stretch>
-        </p:blipFill>
-        <p:spPr>
-          <a:xfrm>
-            <a:off x="184195" y="166221"/>
-            <a:ext cx="1741461" cy="688543"/>
-          </a:xfrm>
-          <a:prstGeom prst="rect">
-            <a:avLst/>
-          </a:prstGeom>
-        </p:spPr>
-      </p:pic>
     </p:spTree>
     <p:extLst>
       <p:ext uri="{BB962C8B-B14F-4D97-AF65-F5344CB8AC3E}">
@@ -8680,7 +7615,7 @@
                 <a:latin typeface="Arial" panose="020B0604020202020204" pitchFamily="34" charset="0"/>
                 <a:cs typeface="Arial" panose="020B0604020202020204" pitchFamily="34" charset="0"/>
               </a:rPr>
-              <a:t>11/14/2025 10:56:04 AM</a:t>
+              <a:t>7/6/2026 6:22:11 PM</a:t>
             </a:fld>
             <a:endParaRPr lang="zh-CN" altLang="en-US" sz="1400" b="1" dirty="0">
               <a:solidFill>
@@ -8728,43 +7663,6 @@
           </a:p>
         </p:txBody>
       </p:sp>
-      <p:pic>
-        <p:nvPicPr>
-          <p:cNvPr id="2" name="图片 1" descr="徽标&#10;&#10;AI 生成的内容可能不正确。">
-            <a:extLst>
-              <a:ext uri="{FF2B5EF4-FFF2-40B4-BE49-F238E27FC236}">
-                <a16:creationId xmlns:a16="http://schemas.microsoft.com/office/drawing/2014/main" id="{900EBE30-110E-570C-A17B-1357D01287EF}"/>
-              </a:ext>
-            </a:extLst>
-          </p:cNvPr>
-          <p:cNvPicPr>
-            <a:picLocks/>
-          </p:cNvPicPr>
-          <p:nvPr/>
-        </p:nvPicPr>
-        <p:blipFill>
-          <a:blip r:embed="rId2">
-            <a:extLst>
-              <a:ext uri="{28A0092B-C50C-407E-A947-70E740481C1C}">
-                <a14:useLocalDpi xmlns:a14="http://schemas.microsoft.com/office/drawing/2010/main" val="0"/>
-              </a:ext>
-            </a:extLst>
-          </a:blip>
-          <a:srcRect t="29985" b="27316"/>
-          <a:stretch>
-            <a:fillRect/>
-          </a:stretch>
-        </p:blipFill>
-        <p:spPr>
-          <a:xfrm>
-            <a:off x="184195" y="166221"/>
-            <a:ext cx="1741461" cy="688543"/>
-          </a:xfrm>
-          <a:prstGeom prst="rect">
-            <a:avLst/>
-          </a:prstGeom>
-        </p:spPr>
-      </p:pic>
     </p:spTree>
     <p:extLst>
       <p:ext uri="{BB962C8B-B14F-4D97-AF65-F5344CB8AC3E}">
@@ -8982,43 +7880,6 @@
           </a:p>
         </p:txBody>
       </p:sp>
-      <p:pic>
-        <p:nvPicPr>
-          <p:cNvPr id="2" name="图片 1" descr="徽标&#10;&#10;AI 生成的内容可能不正确。">
-            <a:extLst>
-              <a:ext uri="{FF2B5EF4-FFF2-40B4-BE49-F238E27FC236}">
-                <a16:creationId xmlns:a16="http://schemas.microsoft.com/office/drawing/2014/main" id="{CC053D65-26B9-B441-0558-973847037A37}"/>
-              </a:ext>
-            </a:extLst>
-          </p:cNvPr>
-          <p:cNvPicPr>
-            <a:picLocks/>
-          </p:cNvPicPr>
-          <p:nvPr/>
-        </p:nvPicPr>
-        <p:blipFill>
-          <a:blip r:embed="rId2">
-            <a:extLst>
-              <a:ext uri="{28A0092B-C50C-407E-A947-70E740481C1C}">
-                <a14:useLocalDpi xmlns:a14="http://schemas.microsoft.com/office/drawing/2010/main" val="0"/>
-              </a:ext>
-            </a:extLst>
-          </a:blip>
-          <a:srcRect t="29985" b="27316"/>
-          <a:stretch>
-            <a:fillRect/>
-          </a:stretch>
-        </p:blipFill>
-        <p:spPr>
-          <a:xfrm>
-            <a:off x="184195" y="166221"/>
-            <a:ext cx="1741461" cy="688543"/>
-          </a:xfrm>
-          <a:prstGeom prst="rect">
-            <a:avLst/>
-          </a:prstGeom>
-        </p:spPr>
-      </p:pic>
     </p:spTree>
     <p:extLst>
       <p:ext uri="{BB962C8B-B14F-4D97-AF65-F5344CB8AC3E}">
@@ -9236,43 +8097,6 @@
           </a:p>
         </p:txBody>
       </p:sp>
-      <p:pic>
-        <p:nvPicPr>
-          <p:cNvPr id="2" name="图片 1" descr="徽标&#10;&#10;AI 生成的内容可能不正确。">
-            <a:extLst>
-              <a:ext uri="{FF2B5EF4-FFF2-40B4-BE49-F238E27FC236}">
-                <a16:creationId xmlns:a16="http://schemas.microsoft.com/office/drawing/2014/main" id="{DCC1C085-F0FF-C0AC-0678-89EEF1FE91B9}"/>
-              </a:ext>
-            </a:extLst>
-          </p:cNvPr>
-          <p:cNvPicPr>
-            <a:picLocks/>
-          </p:cNvPicPr>
-          <p:nvPr/>
-        </p:nvPicPr>
-        <p:blipFill>
-          <a:blip r:embed="rId2">
-            <a:extLst>
-              <a:ext uri="{28A0092B-C50C-407E-A947-70E740481C1C}">
-                <a14:useLocalDpi xmlns:a14="http://schemas.microsoft.com/office/drawing/2010/main" val="0"/>
-              </a:ext>
-            </a:extLst>
-          </a:blip>
-          <a:srcRect t="29985" b="27316"/>
-          <a:stretch>
-            <a:fillRect/>
-          </a:stretch>
-        </p:blipFill>
-        <p:spPr>
-          <a:xfrm>
-            <a:off x="184195" y="166221"/>
-            <a:ext cx="1741461" cy="688543"/>
-          </a:xfrm>
-          <a:prstGeom prst="rect">
-            <a:avLst/>
-          </a:prstGeom>
-        </p:spPr>
-      </p:pic>
     </p:spTree>
     <p:extLst>
       <p:ext uri="{BB962C8B-B14F-4D97-AF65-F5344CB8AC3E}">
@@ -9490,43 +8314,6 @@
           </a:p>
         </p:txBody>
       </p:sp>
-      <p:pic>
-        <p:nvPicPr>
-          <p:cNvPr id="2" name="图片 1" descr="徽标&#10;&#10;AI 生成的内容可能不正确。">
-            <a:extLst>
-              <a:ext uri="{FF2B5EF4-FFF2-40B4-BE49-F238E27FC236}">
-                <a16:creationId xmlns:a16="http://schemas.microsoft.com/office/drawing/2014/main" id="{0220A979-C458-F381-70DD-7545ABF92D50}"/>
-              </a:ext>
-            </a:extLst>
-          </p:cNvPr>
-          <p:cNvPicPr>
-            <a:picLocks/>
-          </p:cNvPicPr>
-          <p:nvPr/>
-        </p:nvPicPr>
-        <p:blipFill>
-          <a:blip r:embed="rId2">
-            <a:extLst>
-              <a:ext uri="{28A0092B-C50C-407E-A947-70E740481C1C}">
-                <a14:useLocalDpi xmlns:a14="http://schemas.microsoft.com/office/drawing/2010/main" val="0"/>
-              </a:ext>
-            </a:extLst>
-          </a:blip>
-          <a:srcRect t="29985" b="27316"/>
-          <a:stretch>
-            <a:fillRect/>
-          </a:stretch>
-        </p:blipFill>
-        <p:spPr>
-          <a:xfrm>
-            <a:off x="184195" y="166221"/>
-            <a:ext cx="1741461" cy="688543"/>
-          </a:xfrm>
-          <a:prstGeom prst="rect">
-            <a:avLst/>
-          </a:prstGeom>
-        </p:spPr>
-      </p:pic>
     </p:spTree>
     <p:extLst>
       <p:ext uri="{BB962C8B-B14F-4D97-AF65-F5344CB8AC3E}">
@@ -9744,43 +8531,6 @@
           </a:p>
         </p:txBody>
       </p:sp>
-      <p:pic>
-        <p:nvPicPr>
-          <p:cNvPr id="5" name="图片 4" descr="徽标&#10;&#10;AI 生成的内容可能不正确。">
-            <a:extLst>
-              <a:ext uri="{FF2B5EF4-FFF2-40B4-BE49-F238E27FC236}">
-                <a16:creationId xmlns:a16="http://schemas.microsoft.com/office/drawing/2014/main" id="{0CACB1C6-241D-0451-D06E-FF9F4A4E09EE}"/>
-              </a:ext>
-            </a:extLst>
-          </p:cNvPr>
-          <p:cNvPicPr>
-            <a:picLocks/>
-          </p:cNvPicPr>
-          <p:nvPr/>
-        </p:nvPicPr>
-        <p:blipFill>
-          <a:blip r:embed="rId2">
-            <a:extLst>
-              <a:ext uri="{28A0092B-C50C-407E-A947-70E740481C1C}">
-                <a14:useLocalDpi xmlns:a14="http://schemas.microsoft.com/office/drawing/2010/main" val="0"/>
-              </a:ext>
-            </a:extLst>
-          </a:blip>
-          <a:srcRect t="29985" b="27316"/>
-          <a:stretch>
-            <a:fillRect/>
-          </a:stretch>
-        </p:blipFill>
-        <p:spPr>
-          <a:xfrm>
-            <a:off x="184195" y="166221"/>
-            <a:ext cx="1741461" cy="688543"/>
-          </a:xfrm>
-          <a:prstGeom prst="rect">
-            <a:avLst/>
-          </a:prstGeom>
-        </p:spPr>
-      </p:pic>
     </p:spTree>
     <p:extLst>
       <p:ext uri="{BB962C8B-B14F-4D97-AF65-F5344CB8AC3E}">
@@ -10055,7 +8805,7 @@
                 <a:latin typeface="Arial" panose="020B0604020202020204" pitchFamily="34" charset="0"/>
                 <a:cs typeface="Arial" panose="020B0604020202020204" pitchFamily="34" charset="0"/>
               </a:rPr>
-              <a:t>11/14/2025 10:54:12 AM</a:t>
+              <a:t>7/6/2026 6:22:11 PM</a:t>
             </a:fld>
             <a:endParaRPr lang="zh-CN" altLang="en-US" sz="1400" b="1" dirty="0">
               <a:solidFill>
@@ -10103,42 +8853,6 @@
           </a:p>
         </p:txBody>
       </p:sp>
-      <p:pic>
-        <p:nvPicPr>
-          <p:cNvPr id="3" name="图片 2" descr="文本&#10;&#10;AI 生成的内容可能不正确。">
-            <a:extLst>
-              <a:ext uri="{FF2B5EF4-FFF2-40B4-BE49-F238E27FC236}">
-                <a16:creationId xmlns:a16="http://schemas.microsoft.com/office/drawing/2014/main" id="{9C019256-55CC-E25C-F092-A5AA10CA928F}"/>
-              </a:ext>
-            </a:extLst>
-          </p:cNvPr>
-          <p:cNvPicPr>
-            <a:picLocks noChangeAspect="1"/>
-          </p:cNvPicPr>
-          <p:nvPr/>
-        </p:nvPicPr>
-        <p:blipFill>
-          <a:blip r:embed="rId2">
-            <a:extLst>
-              <a:ext uri="{28A0092B-C50C-407E-A947-70E740481C1C}">
-                <a14:useLocalDpi xmlns:a14="http://schemas.microsoft.com/office/drawing/2010/main" val="0"/>
-              </a:ext>
-            </a:extLst>
-          </a:blip>
-          <a:stretch>
-            <a:fillRect/>
-          </a:stretch>
-        </p:blipFill>
-        <p:spPr>
-          <a:xfrm>
-            <a:off x="50525" y="164735"/>
-            <a:ext cx="2008800" cy="648980"/>
-          </a:xfrm>
-          <a:prstGeom prst="rect">
-            <a:avLst/>
-          </a:prstGeom>
-        </p:spPr>
-      </p:pic>
     </p:spTree>
     <p:extLst>
       <p:ext uri="{BB962C8B-B14F-4D97-AF65-F5344CB8AC3E}">
@@ -10356,43 +9070,6 @@
           </a:p>
         </p:txBody>
       </p:sp>
-      <p:pic>
-        <p:nvPicPr>
-          <p:cNvPr id="2" name="图片 1" descr="徽标&#10;&#10;AI 生成的内容可能不正确。">
-            <a:extLst>
-              <a:ext uri="{FF2B5EF4-FFF2-40B4-BE49-F238E27FC236}">
-                <a16:creationId xmlns:a16="http://schemas.microsoft.com/office/drawing/2014/main" id="{515428D3-116D-6FA5-00BB-688F2357BF4F}"/>
-              </a:ext>
-            </a:extLst>
-          </p:cNvPr>
-          <p:cNvPicPr>
-            <a:picLocks/>
-          </p:cNvPicPr>
-          <p:nvPr/>
-        </p:nvPicPr>
-        <p:blipFill>
-          <a:blip r:embed="rId2">
-            <a:extLst>
-              <a:ext uri="{28A0092B-C50C-407E-A947-70E740481C1C}">
-                <a14:useLocalDpi xmlns:a14="http://schemas.microsoft.com/office/drawing/2010/main" val="0"/>
-              </a:ext>
-            </a:extLst>
-          </a:blip>
-          <a:srcRect t="29985" b="27316"/>
-          <a:stretch>
-            <a:fillRect/>
-          </a:stretch>
-        </p:blipFill>
-        <p:spPr>
-          <a:xfrm>
-            <a:off x="184195" y="166221"/>
-            <a:ext cx="1741461" cy="688543"/>
-          </a:xfrm>
-          <a:prstGeom prst="rect">
-            <a:avLst/>
-          </a:prstGeom>
-        </p:spPr>
-      </p:pic>
     </p:spTree>
     <p:extLst>
       <p:ext uri="{BB962C8B-B14F-4D97-AF65-F5344CB8AC3E}">
